--- a/usecases/uc-10-vm-migration/TCS-Agentic-AI-UC10-VM-Migration.pptx
+++ b/usecases/uc-10-vm-migration/TCS-Agentic-AI-UC10-VM-Migration.pptx
@@ -17,9 +17,10 @@
     <p:sldId id="265" r:id="rId11"/>
     <p:sldId id="266" r:id="rId12"/>
     <p:sldId id="267" r:id="rId13"/>
+    <p:sldId id="268" r:id="rId14"/>
   </p:sldIdLst>
   <p:notesMasterIdLst>
-    <p:notesMasterId r:id="rId14"/>
+    <p:notesMasterId r:id="rId15"/>
   </p:notesMasterIdLst>
   <p:sldSz cx="12192000" cy="6858000"/>
   <p:notesSz cx="6858000" cy="12192000"/>
@@ -801,6 +802,94 @@
             <a:fld id="{F7021451-1387-4CA6-816F-3879F97B5CBC}" type="slidenum">
               <a:rPr lang="en-US"/>
               <a:t>12</a:t>
+            </a:fld>
+            <a:endParaRPr lang="en-US"/>
+          </a:p>
+        </p:txBody>
+      </p:sp>
+    </p:spTree>
+    <p:extLst>
+      <p:ext uri="{BB962C8B-B14F-4D97-AF65-F5344CB8AC3E}">
+        <p14:creationId xmlns:p14="http://schemas.microsoft.com/office/powerpoint/2010/main" val="1024086991"/>
+      </p:ext>
+    </p:extLst>
+  </p:cSld>
+  <p:clrMapOvr>
+    <a:masterClrMapping/>
+  </p:clrMapOvr>
+</p:notes>
+</file>
+
+<file path=ppt/notesSlides/notesSlide13.xml><?xml version="1.0" encoding="utf-8"?>
+<p:notes xmlns:a="http://schemas.openxmlformats.org/drawingml/2006/main" xmlns:r="http://schemas.openxmlformats.org/officeDocument/2006/relationships" xmlns:p="http://schemas.openxmlformats.org/presentationml/2006/main">
+  <p:cSld>
+    <p:spTree>
+      <p:nvGrpSpPr>
+        <p:cNvPr id="1" name=""/>
+        <p:cNvGrpSpPr/>
+        <p:nvPr/>
+      </p:nvGrpSpPr>
+      <p:grpSpPr>
+        <a:xfrm>
+          <a:off x="0" y="0"/>
+          <a:ext cx="0" cy="0"/>
+          <a:chOff x="0" y="0"/>
+          <a:chExt cx="0" cy="0"/>
+        </a:xfrm>
+      </p:grpSpPr>
+      <p:sp>
+        <p:nvSpPr>
+          <p:cNvPr id="2" name="Slide Image Placeholder 1"/>
+          <p:cNvSpPr>
+            <a:spLocks noGrp="1" noRot="1" noChangeAspect="1"/>
+          </p:cNvSpPr>
+          <p:nvPr>
+            <p:ph type="sldImg"/>
+          </p:nvPr>
+        </p:nvSpPr>
+        <p:spPr/>
+      </p:sp>
+      <p:sp>
+        <p:nvSpPr>
+          <p:cNvPr id="3" name="Notes Placeholder 2"/>
+          <p:cNvSpPr>
+            <a:spLocks noGrp="1"/>
+          </p:cNvSpPr>
+          <p:nvPr>
+            <p:ph type="body" idx="1"/>
+          </p:nvPr>
+        </p:nvSpPr>
+        <p:spPr/>
+        <p:txBody>
+          <a:bodyPr/>
+          <a:lstStyle/>
+          <a:p>
+            <a:r>
+              <a:rPr lang="en-US" dirty="0"/>
+              <a:t/>
+            </a:r>
+            <a:endParaRPr lang="en-US" dirty="0"/>
+          </a:p>
+        </p:txBody>
+      </p:sp>
+      <p:sp>
+        <p:nvSpPr>
+          <p:cNvPr id="4" name="Slide Number Placeholder 3"/>
+          <p:cNvSpPr>
+            <a:spLocks noGrp="1"/>
+          </p:cNvSpPr>
+          <p:nvPr>
+            <p:ph type="sldNum" sz="quarter" idx="10"/>
+          </p:nvPr>
+        </p:nvSpPr>
+        <p:spPr/>
+        <p:txBody>
+          <a:bodyPr/>
+          <a:lstStyle/>
+          <a:p>
+            <a:fld id="{F7021451-1387-4CA6-816F-3879F97B5CBC}" type="slidenum">
+              <a:rPr lang="en-US"/>
+              <a:t>13</a:t>
             </a:fld>
             <a:endParaRPr lang="en-US"/>
           </a:p>
@@ -2672,6 +2761,888 @@
                 <a:ea typeface="Inter" pitchFamily="34" charset="-122"/>
                 <a:cs typeface="Inter" pitchFamily="34" charset="-120"/>
               </a:rPr>
+              <a:t>THE VDDK CHOICE</a:t>
+            </a:r>
+            <a:endParaRPr lang="en-US" sz="1000" dirty="0"/>
+          </a:p>
+        </p:txBody>
+      </p:sp>
+      <p:sp>
+        <p:nvSpPr>
+          <p:cNvPr id="4" name="Text 2"/>
+          <p:cNvSpPr/>
+          <p:nvPr/>
+        </p:nvSpPr>
+        <p:spPr>
+          <a:xfrm>
+            <a:off x="411480" y="310896"/>
+            <a:ext cx="8778240" cy="411480"/>
+          </a:xfrm>
+          <a:prstGeom prst="rect">
+            <a:avLst/>
+          </a:prstGeom>
+          <a:noFill/>
+          <a:ln/>
+        </p:spPr>
+        <p:txBody>
+          <a:bodyPr wrap="square" rtlCol="0" anchor="ctr"/>
+          <a:lstStyle/>
+          <a:p>
+            <a:pPr indent="0" marL="0">
+              <a:buNone/>
+            </a:pPr>
+            <a:r>
+              <a:rPr lang="en-US" sz="2200" b="1" dirty="0">
+                <a:solidFill>
+                  <a:srgbClr val="FFFFFF"/>
+                </a:solidFill>
+                <a:latin typeface="Inter" pitchFamily="34" charset="0"/>
+                <a:ea typeface="Inter" pitchFamily="34" charset="-122"/>
+                <a:cs typeface="Inter" pitchFamily="34" charset="-120"/>
+              </a:rPr>
+              <a:t>The single biggest lever on transfer speed — shown as a number, not a link</a:t>
+            </a:r>
+            <a:endParaRPr lang="en-US" sz="2200" dirty="0"/>
+          </a:p>
+        </p:txBody>
+      </p:sp>
+      <p:sp>
+        <p:nvSpPr>
+          <p:cNvPr id="5" name="Text 3"/>
+          <p:cNvSpPr/>
+          <p:nvPr/>
+        </p:nvSpPr>
+        <p:spPr>
+          <a:xfrm>
+            <a:off x="10625328" y="182880"/>
+            <a:ext cx="1234440" cy="310896"/>
+          </a:xfrm>
+          <a:prstGeom prst="rect">
+            <a:avLst>
+              <a:gd name="adj" fmla="val 14706"/>
+            </a:avLst>
+          </a:prstGeom>
+          <a:solidFill>
+            <a:srgbClr val="2563EB"/>
+          </a:solidFill>
+          <a:ln/>
+        </p:spPr>
+        <p:txBody>
+          <a:bodyPr wrap="square" rtlCol="0" anchor="ctr"/>
+          <a:lstStyle/>
+          <a:p>
+            <a:pPr algn="ctr" indent="0" marL="0">
+              <a:buNone/>
+            </a:pPr>
+            <a:r>
+              <a:rPr lang="en-US" sz="1300" b="1" dirty="0">
+                <a:solidFill>
+                  <a:srgbClr val="FFFFFF"/>
+                </a:solidFill>
+                <a:latin typeface="Inter" pitchFamily="34" charset="0"/>
+                <a:ea typeface="Inter" pitchFamily="34" charset="-122"/>
+                <a:cs typeface="Inter" pitchFamily="34" charset="-120"/>
+              </a:rPr>
+              <a:t>UC-10</a:t>
+            </a:r>
+            <a:endParaRPr lang="en-US" sz="1300" dirty="0"/>
+          </a:p>
+        </p:txBody>
+      </p:sp>
+      <p:sp>
+        <p:nvSpPr>
+          <p:cNvPr id="6" name="Text 4"/>
+          <p:cNvSpPr/>
+          <p:nvPr/>
+        </p:nvSpPr>
+        <p:spPr>
+          <a:xfrm>
+            <a:off x="10168128" y="512064"/>
+            <a:ext cx="1691640" cy="201168"/>
+          </a:xfrm>
+          <a:prstGeom prst="rect">
+            <a:avLst/>
+          </a:prstGeom>
+          <a:noFill/>
+          <a:ln/>
+        </p:spPr>
+        <p:txBody>
+          <a:bodyPr wrap="square" rtlCol="0" anchor="ctr"/>
+          <a:lstStyle/>
+          <a:p>
+            <a:pPr algn="ctr" indent="0" marL="0">
+              <a:buNone/>
+            </a:pPr>
+            <a:r>
+              <a:rPr lang="en-US" sz="750" dirty="0">
+                <a:solidFill>
+                  <a:srgbClr val="94A3B8"/>
+                </a:solidFill>
+                <a:latin typeface="Inter" pitchFamily="34" charset="0"/>
+                <a:ea typeface="Inter" pitchFamily="34" charset="-122"/>
+                <a:cs typeface="Inter" pitchFamily="34" charset="-120"/>
+              </a:rPr>
+              <a:t>TCS Agentic AI</a:t>
+            </a:r>
+            <a:endParaRPr lang="en-US" sz="750" dirty="0"/>
+          </a:p>
+        </p:txBody>
+      </p:sp>
+      <p:sp>
+        <p:nvSpPr>
+          <p:cNvPr id="7" name="Shape 5"/>
+          <p:cNvSpPr/>
+          <p:nvPr/>
+        </p:nvSpPr>
+        <p:spPr>
+          <a:xfrm>
+            <a:off x="411480" y="1371600"/>
+            <a:ext cx="11338560" cy="1051560"/>
+          </a:xfrm>
+          <a:prstGeom prst="roundRect">
+            <a:avLst>
+              <a:gd name="adj" fmla="val 6957"/>
+            </a:avLst>
+          </a:prstGeom>
+          <a:solidFill>
+            <a:srgbClr val="FEE2E2"/>
+          </a:solidFill>
+          <a:ln w="25400">
+            <a:solidFill>
+              <a:srgbClr val="B91C1C"/>
+            </a:solidFill>
+            <a:prstDash val="solid"/>
+          </a:ln>
+        </p:spPr>
+      </p:sp>
+      <p:sp>
+        <p:nvSpPr>
+          <p:cNvPr id="8" name="Text 6"/>
+          <p:cNvSpPr/>
+          <p:nvPr/>
+        </p:nvSpPr>
+        <p:spPr>
+          <a:xfrm>
+            <a:off x="640080" y="1463040"/>
+            <a:ext cx="10881360" cy="384048"/>
+          </a:xfrm>
+          <a:prstGeom prst="rect">
+            <a:avLst/>
+          </a:prstGeom>
+          <a:noFill/>
+          <a:ln/>
+        </p:spPr>
+        <p:txBody>
+          <a:bodyPr wrap="square" rtlCol="0" anchor="ctr"/>
+          <a:lstStyle/>
+          <a:p>
+            <a:pPr indent="0" marL="0">
+              <a:buNone/>
+            </a:pPr>
+            <a:r>
+              <a:rPr lang="en-US" sz="1550" b="1" dirty="0">
+                <a:solidFill>
+                  <a:srgbClr val="B91C1C"/>
+                </a:solidFill>
+                <a:latin typeface="Inter" pitchFamily="34" charset="0"/>
+                <a:ea typeface="Inter" pitchFamily="34" charset="-122"/>
+                <a:cs typeface="Inter" pitchFamily="34" charset="-120"/>
+              </a:rPr>
+              <a:t>A VM backed by vSAN will not migrate without VDDK at all. Everywhere else it is slower and more likely to fail.</a:t>
+            </a:r>
+            <a:endParaRPr lang="en-US" sz="1550" dirty="0"/>
+          </a:p>
+        </p:txBody>
+      </p:sp>
+      <p:sp>
+        <p:nvSpPr>
+          <p:cNvPr id="9" name="Text 7"/>
+          <p:cNvSpPr/>
+          <p:nvPr/>
+        </p:nvSpPr>
+        <p:spPr>
+          <a:xfrm>
+            <a:off x="640080" y="1847088"/>
+            <a:ext cx="10881360" cy="457200"/>
+          </a:xfrm>
+          <a:prstGeom prst="rect">
+            <a:avLst/>
+          </a:prstGeom>
+          <a:noFill/>
+          <a:ln/>
+        </p:spPr>
+        <p:txBody>
+          <a:bodyPr wrap="square" rtlCol="0" anchor="t"/>
+          <a:lstStyle/>
+          <a:p>
+            <a:pPr indent="0" marL="0">
+              <a:buNone/>
+            </a:pPr>
+            <a:r>
+              <a:rPr lang="en-US" sz="1150" dirty="0">
+                <a:solidFill>
+                  <a:srgbClr val="1E293B"/>
+                </a:solidFill>
+                <a:latin typeface="Inter" pitchFamily="34" charset="0"/>
+                <a:ea typeface="Inter" pitchFamily="34" charset="-122"/>
+                <a:cs typeface="Inter" pitchFamily="34" charset="-120"/>
+              </a:rPr>
+              <a:t>Red Hat's guidance is unambiguous: create the VDDK init image. The agent detects whether you have — spec.settings.vddkInitImage on the Provider, free, on a list it already reads.</a:t>
+            </a:r>
+            <a:endParaRPr lang="en-US" sz="1150" dirty="0"/>
+          </a:p>
+        </p:txBody>
+      </p:sp>
+      <p:sp>
+        <p:nvSpPr>
+          <p:cNvPr id="10" name="Shape 8"/>
+          <p:cNvSpPr/>
+          <p:nvPr/>
+        </p:nvSpPr>
+        <p:spPr>
+          <a:xfrm>
+            <a:off x="411480" y="2651760"/>
+            <a:ext cx="2788920" cy="1691640"/>
+          </a:xfrm>
+          <a:prstGeom prst="roundRect">
+            <a:avLst>
+              <a:gd name="adj" fmla="val 4324"/>
+            </a:avLst>
+          </a:prstGeom>
+          <a:solidFill>
+            <a:srgbClr val="D1FAE5"/>
+          </a:solidFill>
+          <a:ln w="25400">
+            <a:solidFill>
+              <a:srgbClr val="059669"/>
+            </a:solidFill>
+            <a:prstDash val="solid"/>
+          </a:ln>
+        </p:spPr>
+      </p:sp>
+      <p:sp>
+        <p:nvSpPr>
+          <p:cNvPr id="11" name="Text 9"/>
+          <p:cNvSpPr/>
+          <p:nvPr/>
+        </p:nvSpPr>
+        <p:spPr>
+          <a:xfrm>
+            <a:off x="576072" y="2743200"/>
+            <a:ext cx="2468880" cy="274320"/>
+          </a:xfrm>
+          <a:prstGeom prst="rect">
+            <a:avLst/>
+          </a:prstGeom>
+          <a:noFill/>
+          <a:ln/>
+        </p:spPr>
+        <p:txBody>
+          <a:bodyPr wrap="square" rtlCol="0" anchor="ctr"/>
+          <a:lstStyle/>
+          <a:p>
+            <a:pPr indent="0" marL="0">
+              <a:buNone/>
+            </a:pPr>
+            <a:r>
+              <a:rPr lang="en-US" sz="1150" b="1" dirty="0">
+                <a:solidFill>
+                  <a:srgbClr val="059669"/>
+                </a:solidFill>
+                <a:latin typeface="Inter" pitchFamily="34" charset="0"/>
+                <a:ea typeface="Inter" pitchFamily="34" charset="-122"/>
+                <a:cs typeface="Inter" pitchFamily="34" charset="-120"/>
+              </a:rPr>
+              <a:t>WITH VDDK</a:t>
+            </a:r>
+            <a:endParaRPr lang="en-US" sz="1150" dirty="0"/>
+          </a:p>
+        </p:txBody>
+      </p:sp>
+      <p:sp>
+        <p:nvSpPr>
+          <p:cNvPr id="12" name="Text 10"/>
+          <p:cNvSpPr/>
+          <p:nvPr/>
+        </p:nvSpPr>
+        <p:spPr>
+          <a:xfrm>
+            <a:off x="576072" y="2999232"/>
+            <a:ext cx="2468880" cy="502920"/>
+          </a:xfrm>
+          <a:prstGeom prst="rect">
+            <a:avLst/>
+          </a:prstGeom>
+          <a:noFill/>
+          <a:ln/>
+        </p:spPr>
+        <p:txBody>
+          <a:bodyPr wrap="square" rtlCol="0" anchor="ctr"/>
+          <a:lstStyle/>
+          <a:p>
+            <a:pPr indent="0" marL="0">
+              <a:buNone/>
+            </a:pPr>
+            <a:r>
+              <a:rPr lang="en-US" sz="2700" b="1" dirty="0">
+                <a:solidFill>
+                  <a:srgbClr val="059669"/>
+                </a:solidFill>
+                <a:latin typeface="Inter" pitchFamily="34" charset="0"/>
+                <a:ea typeface="Inter" pitchFamily="34" charset="-122"/>
+                <a:cs typeface="Inter" pitchFamily="34" charset="-120"/>
+              </a:rPr>
+              <a:t>10 min</a:t>
+            </a:r>
+            <a:endParaRPr lang="en-US" sz="2700" dirty="0"/>
+          </a:p>
+        </p:txBody>
+      </p:sp>
+      <p:sp>
+        <p:nvSpPr>
+          <p:cNvPr id="13" name="Text 11"/>
+          <p:cNvSpPr/>
+          <p:nvPr/>
+        </p:nvSpPr>
+        <p:spPr>
+          <a:xfrm>
+            <a:off x="576072" y="3520440"/>
+            <a:ext cx="2468880" cy="777240"/>
+          </a:xfrm>
+          <a:prstGeom prst="rect">
+            <a:avLst/>
+          </a:prstGeom>
+          <a:noFill/>
+          <a:ln/>
+        </p:spPr>
+        <p:txBody>
+          <a:bodyPr wrap="square" rtlCol="0" anchor="t"/>
+          <a:lstStyle/>
+          <a:p>
+            <a:pPr indent="0" marL="0">
+              <a:buNone/>
+            </a:pPr>
+            <a:r>
+              <a:rPr lang="en-US" sz="1050" dirty="0">
+                <a:solidFill>
+                  <a:srgbClr val="1E293B"/>
+                </a:solidFill>
+                <a:latin typeface="Inter" pitchFamily="34" charset="0"/>
+                <a:ea typeface="Inter" pitchFamily="34" charset="-122"/>
+                <a:cs typeface="Inter" pitchFamily="34" charset="-120"/>
+              </a:rPr>
+              <a:t>transfer</a:t>
+            </a:r>
+            <a:endParaRPr lang="en-US" sz="1050" dirty="0"/>
+          </a:p>
+          <a:p>
+            <a:pPr indent="0" marL="0">
+              <a:buNone/>
+            </a:pPr>
+            <a:r>
+              <a:rPr lang="en-US" sz="1050" dirty="0">
+                <a:solidFill>
+                  <a:srgbClr val="1E293B"/>
+                </a:solidFill>
+                <a:latin typeface="Inter" pitchFamily="34" charset="0"/>
+                <a:ea typeface="Inter" pitchFamily="34" charset="-122"/>
+                <a:cs typeface="Inter" pitchFamily="34" charset="-120"/>
+              </a:rPr>
+              <a:t>6 min downtime</a:t>
+            </a:r>
+            <a:endParaRPr lang="en-US" sz="1050" dirty="0"/>
+          </a:p>
+        </p:txBody>
+      </p:sp>
+      <p:sp>
+        <p:nvSpPr>
+          <p:cNvPr id="14" name="Shape 12"/>
+          <p:cNvSpPr/>
+          <p:nvPr/>
+        </p:nvSpPr>
+        <p:spPr>
+          <a:xfrm>
+            <a:off x="3429000" y="2651760"/>
+            <a:ext cx="2788920" cy="1691640"/>
+          </a:xfrm>
+          <a:prstGeom prst="roundRect">
+            <a:avLst>
+              <a:gd name="adj" fmla="val 4324"/>
+            </a:avLst>
+          </a:prstGeom>
+          <a:solidFill>
+            <a:srgbClr val="FEE2E2"/>
+          </a:solidFill>
+          <a:ln w="25400">
+            <a:solidFill>
+              <a:srgbClr val="B91C1C"/>
+            </a:solidFill>
+            <a:prstDash val="solid"/>
+          </a:ln>
+        </p:spPr>
+      </p:sp>
+      <p:sp>
+        <p:nvSpPr>
+          <p:cNvPr id="15" name="Text 13"/>
+          <p:cNvSpPr/>
+          <p:nvPr/>
+        </p:nvSpPr>
+        <p:spPr>
+          <a:xfrm>
+            <a:off x="3593592" y="2743200"/>
+            <a:ext cx="2468880" cy="274320"/>
+          </a:xfrm>
+          <a:prstGeom prst="rect">
+            <a:avLst/>
+          </a:prstGeom>
+          <a:noFill/>
+          <a:ln/>
+        </p:spPr>
+        <p:txBody>
+          <a:bodyPr wrap="square" rtlCol="0" anchor="ctr"/>
+          <a:lstStyle/>
+          <a:p>
+            <a:pPr indent="0" marL="0">
+              <a:buNone/>
+            </a:pPr>
+            <a:r>
+              <a:rPr lang="en-US" sz="1150" b="1" dirty="0">
+                <a:solidFill>
+                  <a:srgbClr val="B91C1C"/>
+                </a:solidFill>
+                <a:latin typeface="Inter" pitchFamily="34" charset="0"/>
+                <a:ea typeface="Inter" pitchFamily="34" charset="-122"/>
+                <a:cs typeface="Inter" pitchFamily="34" charset="-120"/>
+              </a:rPr>
+              <a:t>WITHOUT VDDK</a:t>
+            </a:r>
+            <a:endParaRPr lang="en-US" sz="1150" dirty="0"/>
+          </a:p>
+        </p:txBody>
+      </p:sp>
+      <p:sp>
+        <p:nvSpPr>
+          <p:cNvPr id="16" name="Text 14"/>
+          <p:cNvSpPr/>
+          <p:nvPr/>
+        </p:nvSpPr>
+        <p:spPr>
+          <a:xfrm>
+            <a:off x="3593592" y="2999232"/>
+            <a:ext cx="2468880" cy="502920"/>
+          </a:xfrm>
+          <a:prstGeom prst="rect">
+            <a:avLst/>
+          </a:prstGeom>
+          <a:noFill/>
+          <a:ln/>
+        </p:spPr>
+        <p:txBody>
+          <a:bodyPr wrap="square" rtlCol="0" anchor="ctr"/>
+          <a:lstStyle/>
+          <a:p>
+            <a:pPr indent="0" marL="0">
+              <a:buNone/>
+            </a:pPr>
+            <a:r>
+              <a:rPr lang="en-US" sz="2700" b="1" dirty="0">
+                <a:solidFill>
+                  <a:srgbClr val="B91C1C"/>
+                </a:solidFill>
+                <a:latin typeface="Inter" pitchFamily="34" charset="0"/>
+                <a:ea typeface="Inter" pitchFamily="34" charset="-122"/>
+                <a:cs typeface="Inter" pitchFamily="34" charset="-120"/>
+              </a:rPr>
+              <a:t>34 min</a:t>
+            </a:r>
+            <a:endParaRPr lang="en-US" sz="2700" dirty="0"/>
+          </a:p>
+        </p:txBody>
+      </p:sp>
+      <p:sp>
+        <p:nvSpPr>
+          <p:cNvPr id="17" name="Text 15"/>
+          <p:cNvSpPr/>
+          <p:nvPr/>
+        </p:nvSpPr>
+        <p:spPr>
+          <a:xfrm>
+            <a:off x="3593592" y="3520440"/>
+            <a:ext cx="2468880" cy="777240"/>
+          </a:xfrm>
+          <a:prstGeom prst="rect">
+            <a:avLst/>
+          </a:prstGeom>
+          <a:noFill/>
+          <a:ln/>
+        </p:spPr>
+        <p:txBody>
+          <a:bodyPr wrap="square" rtlCol="0" anchor="t"/>
+          <a:lstStyle/>
+          <a:p>
+            <a:pPr indent="0" marL="0">
+              <a:buNone/>
+            </a:pPr>
+            <a:r>
+              <a:rPr lang="en-US" sz="1050" dirty="0">
+                <a:solidFill>
+                  <a:srgbClr val="1E293B"/>
+                </a:solidFill>
+                <a:latin typeface="Inter" pitchFamily="34" charset="0"/>
+                <a:ea typeface="Inter" pitchFamily="34" charset="-122"/>
+                <a:cs typeface="Inter" pitchFamily="34" charset="-120"/>
+              </a:rPr>
+              <a:t>transfer</a:t>
+            </a:r>
+            <a:endParaRPr lang="en-US" sz="1050" dirty="0"/>
+          </a:p>
+          <a:p>
+            <a:pPr indent="0" marL="0">
+              <a:buNone/>
+            </a:pPr>
+            <a:r>
+              <a:rPr lang="en-US" sz="1050" dirty="0">
+                <a:solidFill>
+                  <a:srgbClr val="1E293B"/>
+                </a:solidFill>
+                <a:latin typeface="Inter" pitchFamily="34" charset="0"/>
+                <a:ea typeface="Inter" pitchFamily="34" charset="-122"/>
+                <a:cs typeface="Inter" pitchFamily="34" charset="-120"/>
+              </a:rPr>
+              <a:t>34 min downtime</a:t>
+            </a:r>
+            <a:endParaRPr lang="en-US" sz="1050" dirty="0"/>
+          </a:p>
+          <a:p>
+            <a:pPr indent="0" marL="0">
+              <a:buNone/>
+            </a:pPr>
+            <a:r>
+              <a:rPr lang="en-US" sz="1050" dirty="0">
+                <a:solidFill>
+                  <a:srgbClr val="1E293B"/>
+                </a:solidFill>
+                <a:latin typeface="Inter" pitchFamily="34" charset="0"/>
+                <a:ea typeface="Inter" pitchFamily="34" charset="-122"/>
+                <a:cs typeface="Inter" pitchFamily="34" charset="-120"/>
+              </a:rPr>
+              <a:t>vSAN: will not migrate</a:t>
+            </a:r>
+            <a:endParaRPr lang="en-US" sz="1050" dirty="0"/>
+          </a:p>
+        </p:txBody>
+      </p:sp>
+      <p:sp>
+        <p:nvSpPr>
+          <p:cNvPr id="18" name="Shape 16"/>
+          <p:cNvSpPr/>
+          <p:nvPr/>
+        </p:nvSpPr>
+        <p:spPr>
+          <a:xfrm>
+            <a:off x="6537960" y="2651760"/>
+            <a:ext cx="5212080" cy="1691640"/>
+          </a:xfrm>
+          <a:prstGeom prst="roundRect">
+            <a:avLst>
+              <a:gd name="adj" fmla="val 4324"/>
+            </a:avLst>
+          </a:prstGeom>
+          <a:solidFill>
+            <a:srgbClr val="DBEAFE"/>
+          </a:solidFill>
+          <a:ln w="19050">
+            <a:solidFill>
+              <a:srgbClr val="2563EB"/>
+            </a:solidFill>
+            <a:prstDash val="solid"/>
+          </a:ln>
+        </p:spPr>
+      </p:sp>
+      <p:sp>
+        <p:nvSpPr>
+          <p:cNvPr id="19" name="Text 17"/>
+          <p:cNvSpPr/>
+          <p:nvPr/>
+        </p:nvSpPr>
+        <p:spPr>
+          <a:xfrm>
+            <a:off x="6720840" y="2743200"/>
+            <a:ext cx="4846320" cy="274320"/>
+          </a:xfrm>
+          <a:prstGeom prst="rect">
+            <a:avLst/>
+          </a:prstGeom>
+          <a:noFill/>
+          <a:ln/>
+        </p:spPr>
+        <p:txBody>
+          <a:bodyPr wrap="square" rtlCol="0" anchor="ctr"/>
+          <a:lstStyle/>
+          <a:p>
+            <a:pPr indent="0" marL="0">
+              <a:buNone/>
+            </a:pPr>
+            <a:r>
+              <a:rPr lang="en-US" sz="1250" b="1" dirty="0">
+                <a:solidFill>
+                  <a:srgbClr val="2563EB"/>
+                </a:solidFill>
+                <a:latin typeface="Inter" pitchFamily="34" charset="0"/>
+                <a:ea typeface="Inter" pitchFamily="34" charset="-122"/>
+                <a:cs typeface="Inter" pitchFamily="34" charset="-120"/>
+              </a:rPr>
+              <a:t>The speed-up is not invented</a:t>
+            </a:r>
+            <a:endParaRPr lang="en-US" sz="1250" dirty="0"/>
+          </a:p>
+        </p:txBody>
+      </p:sp>
+      <p:sp>
+        <p:nvSpPr>
+          <p:cNvPr id="20" name="Text 18"/>
+          <p:cNvSpPr/>
+          <p:nvPr/>
+        </p:nvSpPr>
+        <p:spPr>
+          <a:xfrm>
+            <a:off x="6720840" y="3017520"/>
+            <a:ext cx="4846320" cy="1280160"/>
+          </a:xfrm>
+          <a:prstGeom prst="rect">
+            <a:avLst/>
+          </a:prstGeom>
+          <a:noFill/>
+          <a:ln/>
+        </p:spPr>
+        <p:txBody>
+          <a:bodyPr wrap="square" rtlCol="0" anchor="t"/>
+          <a:lstStyle/>
+          <a:p>
+            <a:pPr indent="0" marL="0">
+              <a:buNone/>
+            </a:pPr>
+            <a:r>
+              <a:rPr lang="en-US" sz="1000" dirty="0">
+                <a:solidFill>
+                  <a:srgbClr val="1E293B"/>
+                </a:solidFill>
+                <a:latin typeface="Inter" pitchFamily="34" charset="0"/>
+                <a:ea typeface="Inter" pitchFamily="34" charset="-122"/>
+                <a:cs typeface="Inter" pitchFamily="34" charset="-120"/>
+              </a:rPr>
+              <a:t>Measured throughput belongs to the configuration in force — it is the WITH figure when VDDK is configured and the WITHOUT figure when it is not. The other side is derived from a named, printed ratio (default 3, MTV_VDDK_SPEEDUP), and the panel says which half was measured.</a:t>
+            </a:r>
+            <a:endParaRPr lang="en-US" sz="1000" dirty="0"/>
+          </a:p>
+          <a:p>
+            <a:pPr indent="0" marL="0">
+              <a:buNone/>
+            </a:pPr>
+            <a:endParaRPr lang="en-US" sz="1000" dirty="0"/>
+          </a:p>
+          <a:p>
+            <a:pPr indent="0" marL="0">
+              <a:buNone/>
+            </a:pPr>
+            <a:r>
+              <a:rPr lang="en-US" sz="1000" dirty="0">
+                <a:solidFill>
+                  <a:srgbClr val="1E293B"/>
+                </a:solidFill>
+                <a:latin typeface="Inter" pitchFamily="34" charset="0"/>
+                <a:ea typeface="Inter" pitchFamily="34" charset="-122"/>
+                <a:cs typeface="Inter" pitchFamily="34" charset="-120"/>
+              </a:rPr>
+              <a:t>A provider that could not be read reports “we do not know”, never “not configured”.</a:t>
+            </a:r>
+            <a:endParaRPr lang="en-US" sz="1000" dirty="0"/>
+          </a:p>
+        </p:txBody>
+      </p:sp>
+      <p:sp>
+        <p:nvSpPr>
+          <p:cNvPr id="21" name="Shape 19"/>
+          <p:cNvSpPr/>
+          <p:nvPr/>
+        </p:nvSpPr>
+        <p:spPr>
+          <a:xfrm>
+            <a:off x="411480" y="4526280"/>
+            <a:ext cx="11338560" cy="777240"/>
+          </a:xfrm>
+          <a:prstGeom prst="roundRect">
+            <a:avLst>
+              <a:gd name="adj" fmla="val 9412"/>
+            </a:avLst>
+          </a:prstGeom>
+          <a:solidFill>
+            <a:srgbClr val="FEF3C7"/>
+          </a:solidFill>
+          <a:ln w="19050">
+            <a:solidFill>
+              <a:srgbClr val="D97706"/>
+            </a:solidFill>
+            <a:prstDash val="solid"/>
+          </a:ln>
+        </p:spPr>
+      </p:sp>
+      <p:sp>
+        <p:nvSpPr>
+          <p:cNvPr id="22" name="Text 20"/>
+          <p:cNvSpPr/>
+          <p:nvPr/>
+        </p:nvSpPr>
+        <p:spPr>
+          <a:xfrm>
+            <a:off x="640080" y="4617720"/>
+            <a:ext cx="10881360" cy="594360"/>
+          </a:xfrm>
+          <a:prstGeom prst="rect">
+            <a:avLst/>
+          </a:prstGeom>
+          <a:noFill/>
+          <a:ln/>
+        </p:spPr>
+        <p:txBody>
+          <a:bodyPr wrap="square" rtlCol="0" anchor="ctr"/>
+          <a:lstStyle/>
+          <a:p>
+            <a:pPr indent="0" marL="0">
+              <a:buNone/>
+            </a:pPr>
+            <a:r>
+              <a:rPr lang="en-US" sz="1100" b="1" dirty="0">
+                <a:solidFill>
+                  <a:srgbClr val="92400E"/>
+                </a:solidFill>
+                <a:latin typeface="Inter" pitchFamily="34" charset="0"/>
+                <a:ea typeface="Inter" pitchFamily="34" charset="-122"/>
+                <a:cs typeface="Inter" pitchFamily="34" charset="-120"/>
+              </a:rPr>
+              <a:t>Corrected while building this: warm migration does NOT require VDDK — Red Hat ties warm migration to changed block tracking. The assumption was checked against the documentation before it reached the product, rather than after it reached a customer.</a:t>
+            </a:r>
+            <a:endParaRPr lang="en-US" sz="1100" dirty="0"/>
+          </a:p>
+        </p:txBody>
+      </p:sp>
+      <p:sp>
+        <p:nvSpPr>
+          <p:cNvPr id="23" name="Text 21"/>
+          <p:cNvSpPr/>
+          <p:nvPr/>
+        </p:nvSpPr>
+        <p:spPr>
+          <a:xfrm>
+            <a:off x="411480" y="5943600"/>
+            <a:ext cx="11338560" cy="365760"/>
+          </a:xfrm>
+          <a:prstGeom prst="rect">
+            <a:avLst/>
+          </a:prstGeom>
+          <a:noFill/>
+          <a:ln/>
+        </p:spPr>
+        <p:txBody>
+          <a:bodyPr wrap="square" rtlCol="0" anchor="ctr"/>
+          <a:lstStyle/>
+          <a:p>
+            <a:pPr algn="ctr" indent="0" marL="0">
+              <a:buNone/>
+            </a:pPr>
+            <a:r>
+              <a:rPr lang="en-US" sz="1250" b="1" dirty="0">
+                <a:solidFill>
+                  <a:srgbClr val="059669"/>
+                </a:solidFill>
+                <a:latin typeface="Inter" pitchFamily="34" charset="0"/>
+                <a:ea typeface="Inter" pitchFamily="34" charset="-122"/>
+                <a:cs typeface="Inter" pitchFamily="34" charset="-120"/>
+              </a:rPr>
+              <a:t>“34 minutes becomes 10” argues better than a link to the documentation.</a:t>
+            </a:r>
+            <a:endParaRPr lang="en-US" sz="1250" dirty="0"/>
+          </a:p>
+        </p:txBody>
+      </p:sp>
+    </p:spTree>
+  </p:cSld>
+  <p:clrMapOvr>
+    <a:masterClrMapping/>
+  </p:clrMapOvr>
+</p:sld>
+</file>
+
+<file path=ppt/slides/slide11.xml><?xml version="1.0" encoding="utf-8"?>
+<p:sld xmlns:a="http://schemas.openxmlformats.org/drawingml/2006/main" xmlns:r="http://schemas.openxmlformats.org/officeDocument/2006/relationships" xmlns:p="http://schemas.openxmlformats.org/presentationml/2006/main">
+  <p:cSld name="Slide 11">
+    <p:spTree>
+      <p:nvGrpSpPr>
+        <p:cNvPr id="1" name=""/>
+        <p:cNvGrpSpPr/>
+        <p:nvPr/>
+      </p:nvGrpSpPr>
+      <p:grpSpPr>
+        <a:xfrm>
+          <a:off x="0" y="0"/>
+          <a:ext cx="0" cy="0"/>
+          <a:chOff x="0" y="0"/>
+          <a:chExt cx="0" cy="0"/>
+        </a:xfrm>
+      </p:grpSpPr>
+      <p:sp>
+        <p:nvSpPr>
+          <p:cNvPr id="2" name="Shape 0"/>
+          <p:cNvSpPr/>
+          <p:nvPr/>
+        </p:nvSpPr>
+        <p:spPr>
+          <a:xfrm>
+            <a:off x="0" y="0"/>
+            <a:ext cx="12188952" cy="822960"/>
+          </a:xfrm>
+          <a:prstGeom prst="rect">
+            <a:avLst/>
+          </a:prstGeom>
+          <a:solidFill>
+            <a:srgbClr val="0F172A"/>
+          </a:solidFill>
+          <a:ln/>
+        </p:spPr>
+      </p:sp>
+      <p:sp>
+        <p:nvSpPr>
+          <p:cNvPr id="3" name="Text 1"/>
+          <p:cNvSpPr/>
+          <p:nvPr/>
+        </p:nvSpPr>
+        <p:spPr>
+          <a:xfrm>
+            <a:off x="411480" y="109728"/>
+            <a:ext cx="4572000" cy="228600"/>
+          </a:xfrm>
+          <a:prstGeom prst="rect">
+            <a:avLst/>
+          </a:prstGeom>
+          <a:noFill/>
+          <a:ln/>
+        </p:spPr>
+        <p:txBody>
+          <a:bodyPr wrap="square" rtlCol="0" anchor="ctr"/>
+          <a:lstStyle/>
+          <a:p>
+            <a:pPr indent="0" marL="0">
+              <a:buNone/>
+            </a:pPr>
+            <a:r>
+              <a:rPr lang="en-US" sz="1000" b="1" spc="150" kern="0" dirty="0">
+                <a:solidFill>
+                  <a:srgbClr val="0891B2"/>
+                </a:solidFill>
+                <a:latin typeface="Inter" pitchFamily="34" charset="0"/>
+                <a:ea typeface="Inter" pitchFamily="34" charset="-122"/>
+                <a:cs typeface="Inter" pitchFamily="34" charset="-120"/>
+              </a:rPr>
               <a:t>GOVERNANCE</a:t>
             </a:r>
             <a:endParaRPr lang="en-US" sz="1000" dirty="0"/>
@@ -3406,7 +4377,7 @@
       </p:sp>
       <p:graphicFrame>
         <p:nvGraphicFramePr>
-          <p:cNvPr id="11" name="Table 0"/>
+          <p:cNvPr id="12" name="Table 0"/>
           <p:cNvGraphicFramePr>
             <a:graphicFrameLocks noGrp="1"/>
           </p:cNvGraphicFramePr>
@@ -4279,9 +5250,9 @@
 </p:sld>
 </file>
 
-<file path=ppt/slides/slide11.xml><?xml version="1.0" encoding="utf-8"?>
+<file path=ppt/slides/slide12.xml><?xml version="1.0" encoding="utf-8"?>
 <p:sld xmlns:a="http://schemas.openxmlformats.org/drawingml/2006/main" xmlns:r="http://schemas.openxmlformats.org/officeDocument/2006/relationships" xmlns:p="http://schemas.openxmlformats.org/presentationml/2006/main">
-  <p:cSld name="Slide 11">
+  <p:cSld name="Slide 12">
     <p:spTree>
       <p:nvGrpSpPr>
         <p:cNvPr id="1" name=""/>
@@ -4478,7 +5449,7 @@
       </p:sp>
       <p:graphicFrame>
         <p:nvGraphicFramePr>
-          <p:cNvPr id="12" name="Table 0"/>
+          <p:cNvPr id="13" name="Table 0"/>
           <p:cNvGraphicFramePr>
             <a:graphicFrameLocks noGrp="1"/>
           </p:cNvGraphicFramePr>
@@ -6139,9 +7110,9 @@
 </p:sld>
 </file>
 
-<file path=ppt/slides/slide12.xml><?xml version="1.0" encoding="utf-8"?>
+<file path=ppt/slides/slide13.xml><?xml version="1.0" encoding="utf-8"?>
 <p:sld xmlns:a="http://schemas.openxmlformats.org/drawingml/2006/main" xmlns:r="http://schemas.openxmlformats.org/officeDocument/2006/relationships" xmlns:p="http://schemas.openxmlformats.org/presentationml/2006/main">
-  <p:cSld name="Slide 12">
+  <p:cSld name="Slide 13">
     <p:spTree>
       <p:nvGrpSpPr>
         <p:cNvPr id="1" name=""/>
@@ -6338,7 +7309,7 @@
       </p:sp>
       <p:graphicFrame>
         <p:nvGraphicFramePr>
-          <p:cNvPr id="13" name="Table 0"/>
+          <p:cNvPr id="14" name="Table 0"/>
           <p:cNvGraphicFramePr>
             <a:graphicFrameLocks noGrp="1"/>
           </p:cNvGraphicFramePr>
@@ -19477,6 +20448,268 @@
                           <a:cs typeface="Inter" pitchFamily="34" charset="-120"/>
                         </a:rPr>
                         <a:t>✅ Agentless, evidence shown</a:t>
+                      </a:r>
+                      <a:endParaRPr lang="en-US" sz="1000" dirty="0">
+                        <a:latin typeface="Inter" charset="0"/>
+                        <a:ea typeface="Inter" charset="0"/>
+                        <a:cs typeface="Inter" charset="0"/>
+                      </a:endParaRPr>
+                    </a:p>
+                  </a:txBody>
+                  <a:tcPr marL="91440" marR="91440" marT="45720" marB="45720" anchor="ctr">
+                    <a:lnL w="6350" cap="flat" cmpd="sng" algn="ctr">
+                      <a:solidFill>
+                        <a:srgbClr val="CBD5E1"/>
+                      </a:solidFill>
+                      <a:prstDash val="solid"/>
+                      <a:round/>
+                      <a:headEnd type="none" w="med" len="med"/>
+                      <a:tailEnd type="none" w="med" len="med"/>
+                    </a:lnL>
+                    <a:lnR w="6350" cap="flat" cmpd="sng" algn="ctr">
+                      <a:solidFill>
+                        <a:srgbClr val="CBD5E1"/>
+                      </a:solidFill>
+                      <a:prstDash val="solid"/>
+                      <a:round/>
+                      <a:headEnd type="none" w="med" len="med"/>
+                      <a:tailEnd type="none" w="med" len="med"/>
+                    </a:lnR>
+                    <a:lnT w="6350" cap="flat" cmpd="sng" algn="ctr">
+                      <a:solidFill>
+                        <a:srgbClr val="CBD5E1"/>
+                      </a:solidFill>
+                      <a:prstDash val="solid"/>
+                      <a:round/>
+                      <a:headEnd type="none" w="med" len="med"/>
+                      <a:tailEnd type="none" w="med" len="med"/>
+                    </a:lnT>
+                    <a:lnB w="6350" cap="flat" cmpd="sng" algn="ctr">
+                      <a:solidFill>
+                        <a:srgbClr val="CBD5E1"/>
+                      </a:solidFill>
+                      <a:prstDash val="solid"/>
+                      <a:round/>
+                      <a:headEnd type="none" w="med" len="med"/>
+                      <a:tailEnd type="none" w="med" len="med"/>
+                    </a:lnB>
+                  </a:tcPr>
+                </a:tc>
+              </a:tr>
+              <a:tr h="0">
+                <a:tc>
+                  <a:txBody>
+                    <a:bodyPr/>
+                    <a:lstStyle/>
+                    <a:p>
+                      <a:pPr indent="0" marL="0">
+                        <a:buNone/>
+                      </a:pPr>
+                      <a:r>
+                        <a:rPr lang="en-US" sz="1000" dirty="0">
+                          <a:solidFill>
+                            <a:srgbClr val="000000"/>
+                          </a:solidFill>
+                          <a:latin typeface="Inter" pitchFamily="34" charset="0"/>
+                          <a:ea typeface="Inter" pitchFamily="34" charset="-122"/>
+                          <a:cs typeface="Inter" pitchFamily="34" charset="-120"/>
+                        </a:rPr>
+                        <a:t>The wave costed with AND without VDDK</a:t>
+                      </a:r>
+                      <a:endParaRPr lang="en-US" sz="1000" dirty="0">
+                        <a:latin typeface="Inter" charset="0"/>
+                        <a:ea typeface="Inter" charset="0"/>
+                        <a:cs typeface="Inter" charset="0"/>
+                      </a:endParaRPr>
+                    </a:p>
+                  </a:txBody>
+                  <a:tcPr marL="91440" marR="91440" marT="45720" marB="45720" anchor="ctr">
+                    <a:lnL w="6350" cap="flat" cmpd="sng" algn="ctr">
+                      <a:solidFill>
+                        <a:srgbClr val="CBD5E1"/>
+                      </a:solidFill>
+                      <a:prstDash val="solid"/>
+                      <a:round/>
+                      <a:headEnd type="none" w="med" len="med"/>
+                      <a:tailEnd type="none" w="med" len="med"/>
+                    </a:lnL>
+                    <a:lnR w="6350" cap="flat" cmpd="sng" algn="ctr">
+                      <a:solidFill>
+                        <a:srgbClr val="CBD5E1"/>
+                      </a:solidFill>
+                      <a:prstDash val="solid"/>
+                      <a:round/>
+                      <a:headEnd type="none" w="med" len="med"/>
+                      <a:tailEnd type="none" w="med" len="med"/>
+                    </a:lnR>
+                    <a:lnT w="6350" cap="flat" cmpd="sng" algn="ctr">
+                      <a:solidFill>
+                        <a:srgbClr val="CBD5E1"/>
+                      </a:solidFill>
+                      <a:prstDash val="solid"/>
+                      <a:round/>
+                      <a:headEnd type="none" w="med" len="med"/>
+                      <a:tailEnd type="none" w="med" len="med"/>
+                    </a:lnT>
+                    <a:lnB w="6350" cap="flat" cmpd="sng" algn="ctr">
+                      <a:solidFill>
+                        <a:srgbClr val="CBD5E1"/>
+                      </a:solidFill>
+                      <a:prstDash val="solid"/>
+                      <a:round/>
+                      <a:headEnd type="none" w="med" len="med"/>
+                      <a:tailEnd type="none" w="med" len="med"/>
+                    </a:lnB>
+                  </a:tcPr>
+                </a:tc>
+                <a:tc>
+                  <a:txBody>
+                    <a:bodyPr/>
+                    <a:lstStyle/>
+                    <a:p>
+                      <a:pPr indent="0" marL="0">
+                        <a:buNone/>
+                      </a:pPr>
+                      <a:r>
+                        <a:rPr lang="en-US" sz="1000" dirty="0">
+                          <a:solidFill>
+                            <a:srgbClr val="000000"/>
+                          </a:solidFill>
+                          <a:latin typeface="Inter" pitchFamily="34" charset="0"/>
+                          <a:ea typeface="Inter" pitchFamily="34" charset="-122"/>
+                          <a:cs typeface="Inter" pitchFamily="34" charset="-120"/>
+                        </a:rPr>
+                        <a:t>—</a:t>
+                      </a:r>
+                      <a:endParaRPr lang="en-US" sz="1000" dirty="0">
+                        <a:latin typeface="Inter" charset="0"/>
+                        <a:ea typeface="Inter" charset="0"/>
+                        <a:cs typeface="Inter" charset="0"/>
+                      </a:endParaRPr>
+                    </a:p>
+                  </a:txBody>
+                  <a:tcPr marL="91440" marR="91440" marT="45720" marB="45720" anchor="ctr">
+                    <a:lnL w="6350" cap="flat" cmpd="sng" algn="ctr">
+                      <a:solidFill>
+                        <a:srgbClr val="CBD5E1"/>
+                      </a:solidFill>
+                      <a:prstDash val="solid"/>
+                      <a:round/>
+                      <a:headEnd type="none" w="med" len="med"/>
+                      <a:tailEnd type="none" w="med" len="med"/>
+                    </a:lnL>
+                    <a:lnR w="6350" cap="flat" cmpd="sng" algn="ctr">
+                      <a:solidFill>
+                        <a:srgbClr val="CBD5E1"/>
+                      </a:solidFill>
+                      <a:prstDash val="solid"/>
+                      <a:round/>
+                      <a:headEnd type="none" w="med" len="med"/>
+                      <a:tailEnd type="none" w="med" len="med"/>
+                    </a:lnR>
+                    <a:lnT w="6350" cap="flat" cmpd="sng" algn="ctr">
+                      <a:solidFill>
+                        <a:srgbClr val="CBD5E1"/>
+                      </a:solidFill>
+                      <a:prstDash val="solid"/>
+                      <a:round/>
+                      <a:headEnd type="none" w="med" len="med"/>
+                      <a:tailEnd type="none" w="med" len="med"/>
+                    </a:lnT>
+                    <a:lnB w="6350" cap="flat" cmpd="sng" algn="ctr">
+                      <a:solidFill>
+                        <a:srgbClr val="CBD5E1"/>
+                      </a:solidFill>
+                      <a:prstDash val="solid"/>
+                      <a:round/>
+                      <a:headEnd type="none" w="med" len="med"/>
+                      <a:tailEnd type="none" w="med" len="med"/>
+                    </a:lnB>
+                  </a:tcPr>
+                </a:tc>
+                <a:tc>
+                  <a:txBody>
+                    <a:bodyPr/>
+                    <a:lstStyle/>
+                    <a:p>
+                      <a:pPr indent="0" marL="0">
+                        <a:buNone/>
+                      </a:pPr>
+                      <a:r>
+                        <a:rPr lang="en-US" sz="1000" dirty="0">
+                          <a:solidFill>
+                            <a:srgbClr val="000000"/>
+                          </a:solidFill>
+                          <a:latin typeface="Inter" pitchFamily="34" charset="0"/>
+                          <a:ea typeface="Inter" pitchFamily="34" charset="-122"/>
+                          <a:cs typeface="Inter" pitchFamily="34" charset="-120"/>
+                        </a:rPr>
+                        <a:t>—</a:t>
+                      </a:r>
+                      <a:endParaRPr lang="en-US" sz="1000" dirty="0">
+                        <a:latin typeface="Inter" charset="0"/>
+                        <a:ea typeface="Inter" charset="0"/>
+                        <a:cs typeface="Inter" charset="0"/>
+                      </a:endParaRPr>
+                    </a:p>
+                  </a:txBody>
+                  <a:tcPr marL="91440" marR="91440" marT="45720" marB="45720" anchor="ctr">
+                    <a:lnL w="6350" cap="flat" cmpd="sng" algn="ctr">
+                      <a:solidFill>
+                        <a:srgbClr val="CBD5E1"/>
+                      </a:solidFill>
+                      <a:prstDash val="solid"/>
+                      <a:round/>
+                      <a:headEnd type="none" w="med" len="med"/>
+                      <a:tailEnd type="none" w="med" len="med"/>
+                    </a:lnL>
+                    <a:lnR w="6350" cap="flat" cmpd="sng" algn="ctr">
+                      <a:solidFill>
+                        <a:srgbClr val="CBD5E1"/>
+                      </a:solidFill>
+                      <a:prstDash val="solid"/>
+                      <a:round/>
+                      <a:headEnd type="none" w="med" len="med"/>
+                      <a:tailEnd type="none" w="med" len="med"/>
+                    </a:lnR>
+                    <a:lnT w="6350" cap="flat" cmpd="sng" algn="ctr">
+                      <a:solidFill>
+                        <a:srgbClr val="CBD5E1"/>
+                      </a:solidFill>
+                      <a:prstDash val="solid"/>
+                      <a:round/>
+                      <a:headEnd type="none" w="med" len="med"/>
+                      <a:tailEnd type="none" w="med" len="med"/>
+                    </a:lnT>
+                    <a:lnB w="6350" cap="flat" cmpd="sng" algn="ctr">
+                      <a:solidFill>
+                        <a:srgbClr val="CBD5E1"/>
+                      </a:solidFill>
+                      <a:prstDash val="solid"/>
+                      <a:round/>
+                      <a:headEnd type="none" w="med" len="med"/>
+                      <a:tailEnd type="none" w="med" len="med"/>
+                    </a:lnB>
+                  </a:tcPr>
+                </a:tc>
+                <a:tc>
+                  <a:txBody>
+                    <a:bodyPr/>
+                    <a:lstStyle/>
+                    <a:p>
+                      <a:pPr indent="0" marL="0">
+                        <a:buNone/>
+                      </a:pPr>
+                      <a:r>
+                        <a:rPr lang="en-US" sz="1000" dirty="0">
+                          <a:solidFill>
+                            <a:srgbClr val="000000"/>
+                          </a:solidFill>
+                          <a:latin typeface="Inter" pitchFamily="34" charset="0"/>
+                          <a:ea typeface="Inter" pitchFamily="34" charset="-122"/>
+                          <a:cs typeface="Inter" pitchFamily="34" charset="-120"/>
+                        </a:rPr>
+                        <a:t>✅ Both shown, configured path marked</a:t>
                       </a:r>
                       <a:endParaRPr lang="en-US" sz="1000" dirty="0">
                         <a:latin typeface="Inter" charset="0"/>

--- a/usecases/uc-10-vm-migration/TCS-Agentic-AI-UC10-VM-Migration.pptx
+++ b/usecases/uc-10-vm-migration/TCS-Agentic-AI-UC10-VM-Migration.pptx
@@ -3431,7 +3431,30 @@
                 <a:ea typeface="Inter" pitchFamily="34" charset="-122"/>
                 <a:cs typeface="Inter" pitchFamily="34" charset="-120"/>
               </a:rPr>
-              <a:t>Measured throughput belongs to the configuration in force — it is the WITH figure when VDDK is configured and the WITHOUT figure when it is not. The other side is derived from a named, printed ratio (default 3, MTV_VDDK_SPEEDUP), and the panel says which half was measured.</a:t>
+              <a:t>Red Hat publishes NO throughput figure — only that migrating without VDDK “could result in significantly lower migration speeds”. The panel quotes that and labels the 3× default (MTV_VDDK_SPEEDUP) as this product’s assumption.</a:t>
+            </a:r>
+            <a:endParaRPr lang="en-US" sz="1000" dirty="0"/>
+          </a:p>
+          <a:p>
+            <a:pPr indent="0" marL="0">
+              <a:buNone/>
+            </a:pPr>
+            <a:endParaRPr lang="en-US" sz="1000" dirty="0"/>
+          </a:p>
+          <a:p>
+            <a:pPr indent="0" marL="0">
+              <a:buNone/>
+            </a:pPr>
+            <a:r>
+              <a:rPr lang="en-US" sz="1000" dirty="0">
+                <a:solidFill>
+                  <a:srgbClr val="1E293B"/>
+                </a:solidFill>
+                <a:latin typeface="Inter" pitchFamily="34" charset="0"/>
+                <a:ea typeface="Inter" pitchFamily="34" charset="-122"/>
+                <a:cs typeface="Inter" pitchFamily="34" charset="-120"/>
+              </a:rPr>
+              <a:t>Whatever rate is in hand describes the configuration IN FORCE; the other side is derived from it, and the panel says which half was measured.</a:t>
             </a:r>
             <a:endParaRPr lang="en-US" sz="1000" dirty="0"/>
           </a:p>

--- a/usecases/uc-10-vm-migration/TCS-Agentic-AI-UC10-VM-Migration.pptx
+++ b/usecases/uc-10-vm-migration/TCS-Agentic-AI-UC10-VM-Migration.pptx
@@ -2188,8 +2188,8 @@
         </p:nvSpPr>
         <p:spPr>
           <a:xfrm>
-            <a:off x="731520" y="1810512"/>
-            <a:ext cx="10881360" cy="777240"/>
+            <a:off x="731520" y="1755648"/>
+            <a:ext cx="10881360" cy="658368"/>
           </a:xfrm>
           <a:prstGeom prst="rect">
             <a:avLst/>
@@ -2213,7 +2213,7 @@
                 <a:ea typeface="Inter" pitchFamily="34" charset="-122"/>
                 <a:cs typeface="Inter" pitchFamily="34" charset="-120"/>
               </a:rPr>
-              <a:t>VMware → OpenShift Virtualization</a:t>
+              <a:t>VM Migration Assurance</a:t>
             </a:r>
             <a:endParaRPr lang="en-US" sz="3700" dirty="0"/>
           </a:p>
@@ -2222,6 +2222,45 @@
       <p:sp>
         <p:nvSpPr>
           <p:cNvPr id="5" name="Text 3"/>
+          <p:cNvSpPr/>
+          <p:nvPr/>
+        </p:nvSpPr>
+        <p:spPr>
+          <a:xfrm>
+            <a:off x="731520" y="2395728"/>
+            <a:ext cx="10881360" cy="457200"/>
+          </a:xfrm>
+          <a:prstGeom prst="rect">
+            <a:avLst/>
+          </a:prstGeom>
+          <a:noFill/>
+          <a:ln/>
+        </p:spPr>
+        <p:txBody>
+          <a:bodyPr wrap="square" rtlCol="0" anchor="ctr"/>
+          <a:lstStyle/>
+          <a:p>
+            <a:pPr indent="0" marL="0">
+              <a:buNone/>
+            </a:pPr>
+            <a:r>
+              <a:rPr lang="en-US" sz="2100" dirty="0">
+                <a:solidFill>
+                  <a:srgbClr val="0891B2"/>
+                </a:solidFill>
+                <a:latin typeface="Inter" pitchFamily="34" charset="0"/>
+                <a:ea typeface="Inter" pitchFamily="34" charset="-122"/>
+                <a:cs typeface="Inter" pitchFamily="34" charset="-120"/>
+              </a:rPr>
+              <a:t>VMware  →  OpenShift Virtualization</a:t>
+            </a:r>
+            <a:endParaRPr lang="en-US" sz="2100" dirty="0"/>
+          </a:p>
+        </p:txBody>
+      </p:sp>
+      <p:sp>
+        <p:nvSpPr>
+          <p:cNvPr id="6" name="Text 4"/>
           <p:cNvSpPr/>
           <p:nvPr/>
         </p:nvSpPr>
@@ -2252,7 +2291,7 @@
                 <a:ea typeface="Inter" pitchFamily="34" charset="-122"/>
                 <a:cs typeface="Inter" pitchFamily="34" charset="-120"/>
               </a:rPr>
-              <a:t>VM Migration Agent  ·  assess against the target, govern the change, measure the move</a:t>
+              <a:t>VM Migration Agent  ·  assess against the target, govern the change, prove the result</a:t>
             </a:r>
             <a:endParaRPr lang="en-US" sz="1550" dirty="0"/>
           </a:p>
@@ -2260,7 +2299,7 @@
       </p:sp>
       <p:sp>
         <p:nvSpPr>
-          <p:cNvPr id="6" name="Text 4"/>
+          <p:cNvPr id="7" name="Text 5"/>
           <p:cNvSpPr/>
           <p:nvPr/>
         </p:nvSpPr>
@@ -2299,7 +2338,7 @@
       </p:sp>
       <p:sp>
         <p:nvSpPr>
-          <p:cNvPr id="7" name="Shape 5"/>
+          <p:cNvPr id="8" name="Shape 6"/>
           <p:cNvSpPr/>
           <p:nvPr/>
         </p:nvSpPr>
@@ -2326,7 +2365,7 @@
       </p:sp>
       <p:sp>
         <p:nvSpPr>
-          <p:cNvPr id="8" name="Text 6"/>
+          <p:cNvPr id="9" name="Text 7"/>
           <p:cNvSpPr/>
           <p:nvPr/>
         </p:nvSpPr>
@@ -2357,7 +2396,7 @@
                 <a:ea typeface="Inter" pitchFamily="34" charset="-122"/>
                 <a:cs typeface="Inter" pitchFamily="34" charset="-120"/>
               </a:rPr>
-              <a:t>4</a:t>
+              <a:t>9</a:t>
             </a:r>
             <a:endParaRPr lang="en-US" sz="2600" dirty="0"/>
           </a:p>
@@ -2365,7 +2404,7 @@
       </p:sp>
       <p:sp>
         <p:nvSpPr>
-          <p:cNvPr id="9" name="Text 7"/>
+          <p:cNvPr id="10" name="Text 8"/>
           <p:cNvSpPr/>
           <p:nvPr/>
         </p:nvSpPr>
@@ -2396,7 +2435,7 @@
                 <a:ea typeface="Inter" pitchFamily="34" charset="-122"/>
                 <a:cs typeface="Inter" pitchFamily="34" charset="-120"/>
               </a:rPr>
-              <a:t>Steps, four decisions</a:t>
+              <a:t>Stages, end to end</a:t>
             </a:r>
             <a:endParaRPr lang="en-US" sz="900" dirty="0"/>
           </a:p>
@@ -2404,7 +2443,7 @@
       </p:sp>
       <p:sp>
         <p:nvSpPr>
-          <p:cNvPr id="10" name="Shape 8"/>
+          <p:cNvPr id="11" name="Shape 9"/>
           <p:cNvSpPr/>
           <p:nvPr/>
         </p:nvSpPr>
@@ -2431,7 +2470,7 @@
       </p:sp>
       <p:sp>
         <p:nvSpPr>
-          <p:cNvPr id="11" name="Text 9"/>
+          <p:cNvPr id="12" name="Text 10"/>
           <p:cNvSpPr/>
           <p:nvPr/>
         </p:nvSpPr>
@@ -2470,7 +2509,7 @@
       </p:sp>
       <p:sp>
         <p:nvSpPr>
-          <p:cNvPr id="12" name="Text 10"/>
+          <p:cNvPr id="13" name="Text 11"/>
           <p:cNvSpPr/>
           <p:nvPr/>
         </p:nvSpPr>
@@ -2509,7 +2548,7 @@
       </p:sp>
       <p:sp>
         <p:nvSpPr>
-          <p:cNvPr id="13" name="Shape 11"/>
+          <p:cNvPr id="14" name="Shape 12"/>
           <p:cNvSpPr/>
           <p:nvPr/>
         </p:nvSpPr>
@@ -2536,7 +2575,7 @@
       </p:sp>
       <p:sp>
         <p:nvSpPr>
-          <p:cNvPr id="14" name="Text 12"/>
+          <p:cNvPr id="15" name="Text 13"/>
           <p:cNvSpPr/>
           <p:nvPr/>
         </p:nvSpPr>
@@ -2567,7 +2606,7 @@
                 <a:ea typeface="Inter" pitchFamily="34" charset="-122"/>
                 <a:cs typeface="Inter" pitchFamily="34" charset="-120"/>
               </a:rPr>
-              <a:t>3</a:t>
+              <a:t>5</a:t>
             </a:r>
             <a:endParaRPr lang="en-US" sz="2600" dirty="0"/>
           </a:p>
@@ -2575,7 +2614,7 @@
       </p:sp>
       <p:sp>
         <p:nvSpPr>
-          <p:cNvPr id="15" name="Text 13"/>
+          <p:cNvPr id="16" name="Text 14"/>
           <p:cNvSpPr/>
           <p:nvPr/>
         </p:nvSpPr>
@@ -2606,7 +2645,7 @@
                 <a:ea typeface="Inter" pitchFamily="34" charset="-122"/>
                 <a:cs typeface="Inter" pitchFamily="34" charset="-120"/>
               </a:rPr>
-              <a:t>Red Hat support tiers</a:t>
+              <a:t>Post-migration checks</a:t>
             </a:r>
             <a:endParaRPr lang="en-US" sz="900" dirty="0"/>
           </a:p>
@@ -2614,7 +2653,7 @@
       </p:sp>
       <p:sp>
         <p:nvSpPr>
-          <p:cNvPr id="16" name="Shape 14"/>
+          <p:cNvPr id="17" name="Shape 15"/>
           <p:cNvSpPr/>
           <p:nvPr/>
         </p:nvSpPr>
@@ -2641,7 +2680,7 @@
       </p:sp>
       <p:sp>
         <p:nvSpPr>
-          <p:cNvPr id="17" name="Text 15"/>
+          <p:cNvPr id="18" name="Text 16"/>
           <p:cNvSpPr/>
           <p:nvPr/>
         </p:nvSpPr>
@@ -2680,7 +2719,7 @@
       </p:sp>
       <p:sp>
         <p:nvSpPr>
-          <p:cNvPr id="18" name="Text 16"/>
+          <p:cNvPr id="19" name="Text 17"/>
           <p:cNvSpPr/>
           <p:nvPr/>
         </p:nvSpPr>
@@ -2719,7 +2758,7 @@
       </p:sp>
       <p:sp>
         <p:nvSpPr>
-          <p:cNvPr id="19" name="Shape 17"/>
+          <p:cNvPr id="20" name="Shape 18"/>
           <p:cNvSpPr/>
           <p:nvPr/>
         </p:nvSpPr>
@@ -2746,7 +2785,7 @@
       </p:sp>
       <p:sp>
         <p:nvSpPr>
-          <p:cNvPr id="20" name="Text 18"/>
+          <p:cNvPr id="21" name="Text 19"/>
           <p:cNvSpPr/>
           <p:nvPr/>
         </p:nvSpPr>
@@ -2777,7 +2816,7 @@
                 <a:ea typeface="Inter" pitchFamily="34" charset="-122"/>
                 <a:cs typeface="Inter" pitchFamily="34" charset="-120"/>
               </a:rPr>
-              <a:t>230</a:t>
+              <a:t>2</a:t>
             </a:r>
             <a:endParaRPr lang="en-US" sz="2600" dirty="0"/>
           </a:p>
@@ -2785,7 +2824,7 @@
       </p:sp>
       <p:sp>
         <p:nvSpPr>
-          <p:cNvPr id="21" name="Text 19"/>
+          <p:cNvPr id="22" name="Text 20"/>
           <p:cNvSpPr/>
           <p:nvPr/>
         </p:nvSpPr>
@@ -2816,7 +2855,7 @@
                 <a:ea typeface="Inter" pitchFamily="34" charset="-122"/>
                 <a:cs typeface="Inter" pitchFamily="34" charset="-120"/>
               </a:rPr>
-              <a:t>Unit tests pinning it</a:t>
+              <a:t>AI steps of 58</a:t>
             </a:r>
             <a:endParaRPr lang="en-US" sz="900" dirty="0"/>
           </a:p>
@@ -2824,7 +2863,7 @@
       </p:sp>
       <p:sp>
         <p:nvSpPr>
-          <p:cNvPr id="22" name="Text 20"/>
+          <p:cNvPr id="23" name="Text 21"/>
           <p:cNvSpPr/>
           <p:nvPr/>
         </p:nvSpPr>

--- a/usecases/uc-10-vm-migration/TCS-Agentic-AI-UC10-VM-Migration.pptx
+++ b/usecases/uc-10-vm-migration/TCS-Agentic-AI-UC10-VM-Migration.pptx
@@ -2344,12 +2344,12 @@
         </p:nvSpPr>
         <p:spPr>
           <a:xfrm>
-            <a:off x="731520" y="4434840"/>
-            <a:ext cx="2011680" cy="1051560"/>
+            <a:off x="731520" y="4160520"/>
+            <a:ext cx="10607040" cy="384048"/>
           </a:xfrm>
           <a:prstGeom prst="roundRect">
             <a:avLst>
-              <a:gd name="adj" fmla="val 5217"/>
+              <a:gd name="adj" fmla="val 11905"/>
             </a:avLst>
           </a:prstGeom>
           <a:solidFill>
@@ -2371,8 +2371,74 @@
         </p:nvSpPr>
         <p:spPr>
           <a:xfrm>
-            <a:off x="731520" y="4544568"/>
-            <a:ext cx="2011680" cy="457200"/>
+            <a:off x="868680" y="4160520"/>
+            <a:ext cx="10332720" cy="384048"/>
+          </a:xfrm>
+          <a:prstGeom prst="rect">
+            <a:avLst/>
+          </a:prstGeom>
+          <a:noFill/>
+          <a:ln/>
+        </p:spPr>
+        <p:txBody>
+          <a:bodyPr wrap="square" rtlCol="0" anchor="ctr"/>
+          <a:lstStyle/>
+          <a:p>
+            <a:pPr indent="0" marL="0">
+              <a:buNone/>
+            </a:pPr>
+            <a:r>
+              <a:rPr lang="en-US" sz="1050" dirty="0">
+                <a:solidFill>
+                  <a:srgbClr val="CBD5E1"/>
+                </a:solidFill>
+                <a:latin typeface="Inter" pitchFamily="34" charset="0"/>
+                <a:ea typeface="Inter" pitchFamily="34" charset="-122"/>
+                <a:cs typeface="Inter" pitchFamily="34" charset="-120"/>
+              </a:rPr>
+              <a:t>SCOPE   ·   VMs that ALREADY EXIST on VMware and are moving to OpenShift Virtualization.      Once landed, they are governed by UC-06, VM Lifecycle.</a:t>
+            </a:r>
+            <a:endParaRPr lang="en-US" sz="1050" dirty="0"/>
+          </a:p>
+        </p:txBody>
+      </p:sp>
+      <p:sp>
+        <p:nvSpPr>
+          <p:cNvPr id="10" name="Shape 8"/>
+          <p:cNvSpPr/>
+          <p:nvPr/>
+        </p:nvSpPr>
+        <p:spPr>
+          <a:xfrm>
+            <a:off x="731520" y="4681728"/>
+            <a:ext cx="2011680" cy="960120"/>
+          </a:xfrm>
+          <a:prstGeom prst="roundRect">
+            <a:avLst>
+              <a:gd name="adj" fmla="val 5714"/>
+            </a:avLst>
+          </a:prstGeom>
+          <a:solidFill>
+            <a:srgbClr val="1E293B"/>
+          </a:solidFill>
+          <a:ln w="12700">
+            <a:solidFill>
+              <a:srgbClr val="334155"/>
+            </a:solidFill>
+            <a:prstDash val="solid"/>
+          </a:ln>
+        </p:spPr>
+      </p:sp>
+      <p:sp>
+        <p:nvSpPr>
+          <p:cNvPr id="11" name="Text 9"/>
+          <p:cNvSpPr/>
+          <p:nvPr/>
+        </p:nvSpPr>
+        <p:spPr>
+          <a:xfrm>
+            <a:off x="731520" y="4754880"/>
+            <a:ext cx="2011680" cy="420624"/>
           </a:xfrm>
           <a:prstGeom prst="rect">
             <a:avLst/>
@@ -2388,7 +2454,7 @@
               <a:buNone/>
             </a:pPr>
             <a:r>
-              <a:rPr lang="en-US" sz="2600" b="1" dirty="0">
+              <a:rPr lang="en-US" sz="2400" b="1" dirty="0">
                 <a:solidFill>
                   <a:srgbClr val="0891B2"/>
                 </a:solidFill>
@@ -2398,19 +2464,19 @@
               </a:rPr>
               <a:t>9</a:t>
             </a:r>
-            <a:endParaRPr lang="en-US" sz="2600" dirty="0"/>
+            <a:endParaRPr lang="en-US" sz="2400" dirty="0"/>
           </a:p>
         </p:txBody>
       </p:sp>
       <p:sp>
         <p:nvSpPr>
-          <p:cNvPr id="10" name="Text 8"/>
-          <p:cNvSpPr/>
-          <p:nvPr/>
-        </p:nvSpPr>
-        <p:spPr>
-          <a:xfrm>
-            <a:off x="731520" y="5001768"/>
+          <p:cNvPr id="12" name="Text 10"/>
+          <p:cNvSpPr/>
+          <p:nvPr/>
+        </p:nvSpPr>
+        <p:spPr>
+          <a:xfrm>
+            <a:off x="731520" y="5175504"/>
             <a:ext cx="2011680" cy="274320"/>
           </a:xfrm>
           <a:prstGeom prst="rect">
@@ -2427,7 +2493,7 @@
               <a:buNone/>
             </a:pPr>
             <a:r>
-              <a:rPr lang="en-US" sz="900" dirty="0">
+              <a:rPr lang="en-US" sz="850" dirty="0">
                 <a:solidFill>
                   <a:srgbClr val="94A3B8"/>
                 </a:solidFill>
@@ -2437,24 +2503,24 @@
               </a:rPr>
               <a:t>Stages, end to end</a:t>
             </a:r>
-            <a:endParaRPr lang="en-US" sz="900" dirty="0"/>
+            <a:endParaRPr lang="en-US" sz="850" dirty="0"/>
           </a:p>
         </p:txBody>
       </p:sp>
       <p:sp>
         <p:nvSpPr>
-          <p:cNvPr id="11" name="Shape 9"/>
-          <p:cNvSpPr/>
-          <p:nvPr/>
-        </p:nvSpPr>
-        <p:spPr>
-          <a:xfrm>
-            <a:off x="2944368" y="4434840"/>
-            <a:ext cx="2011680" cy="1051560"/>
+          <p:cNvPr id="13" name="Shape 11"/>
+          <p:cNvSpPr/>
+          <p:nvPr/>
+        </p:nvSpPr>
+        <p:spPr>
+          <a:xfrm>
+            <a:off x="2944368" y="4681728"/>
+            <a:ext cx="2011680" cy="960120"/>
           </a:xfrm>
           <a:prstGeom prst="roundRect">
             <a:avLst>
-              <a:gd name="adj" fmla="val 5217"/>
+              <a:gd name="adj" fmla="val 5714"/>
             </a:avLst>
           </a:prstGeom>
           <a:solidFill>
@@ -2470,14 +2536,14 @@
       </p:sp>
       <p:sp>
         <p:nvSpPr>
-          <p:cNvPr id="12" name="Text 10"/>
-          <p:cNvSpPr/>
-          <p:nvPr/>
-        </p:nvSpPr>
-        <p:spPr>
-          <a:xfrm>
-            <a:off x="2944368" y="4544568"/>
-            <a:ext cx="2011680" cy="457200"/>
+          <p:cNvPr id="14" name="Text 12"/>
+          <p:cNvSpPr/>
+          <p:nvPr/>
+        </p:nvSpPr>
+        <p:spPr>
+          <a:xfrm>
+            <a:off x="2944368" y="4754880"/>
+            <a:ext cx="2011680" cy="420624"/>
           </a:xfrm>
           <a:prstGeom prst="rect">
             <a:avLst/>
@@ -2493,7 +2559,7 @@
               <a:buNone/>
             </a:pPr>
             <a:r>
-              <a:rPr lang="en-US" sz="2600" b="1" dirty="0">
+              <a:rPr lang="en-US" sz="2400" b="1" dirty="0">
                 <a:solidFill>
                   <a:srgbClr val="0891B2"/>
                 </a:solidFill>
@@ -2503,19 +2569,19 @@
               </a:rPr>
               <a:t>15</a:t>
             </a:r>
-            <a:endParaRPr lang="en-US" sz="2600" dirty="0"/>
+            <a:endParaRPr lang="en-US" sz="2400" dirty="0"/>
           </a:p>
         </p:txBody>
       </p:sp>
       <p:sp>
         <p:nvSpPr>
-          <p:cNvPr id="13" name="Text 11"/>
-          <p:cNvSpPr/>
-          <p:nvPr/>
-        </p:nvSpPr>
-        <p:spPr>
-          <a:xfrm>
-            <a:off x="2944368" y="5001768"/>
+          <p:cNvPr id="15" name="Text 13"/>
+          <p:cNvSpPr/>
+          <p:nvPr/>
+        </p:nvSpPr>
+        <p:spPr>
+          <a:xfrm>
+            <a:off x="2944368" y="5175504"/>
             <a:ext cx="2011680" cy="274320"/>
           </a:xfrm>
           <a:prstGeom prst="rect">
@@ -2532,7 +2598,7 @@
               <a:buNone/>
             </a:pPr>
             <a:r>
-              <a:rPr lang="en-US" sz="900" dirty="0">
+              <a:rPr lang="en-US" sz="850" dirty="0">
                 <a:solidFill>
                   <a:srgbClr val="94A3B8"/>
                 </a:solidFill>
@@ -2542,24 +2608,24 @@
               </a:rPr>
               <a:t>Source-side checks</a:t>
             </a:r>
-            <a:endParaRPr lang="en-US" sz="900" dirty="0"/>
+            <a:endParaRPr lang="en-US" sz="850" dirty="0"/>
           </a:p>
         </p:txBody>
       </p:sp>
       <p:sp>
         <p:nvSpPr>
-          <p:cNvPr id="14" name="Shape 12"/>
-          <p:cNvSpPr/>
-          <p:nvPr/>
-        </p:nvSpPr>
-        <p:spPr>
-          <a:xfrm>
-            <a:off x="5157216" y="4434840"/>
-            <a:ext cx="2011680" cy="1051560"/>
+          <p:cNvPr id="16" name="Shape 14"/>
+          <p:cNvSpPr/>
+          <p:nvPr/>
+        </p:nvSpPr>
+        <p:spPr>
+          <a:xfrm>
+            <a:off x="5157216" y="4681728"/>
+            <a:ext cx="2011680" cy="960120"/>
           </a:xfrm>
           <a:prstGeom prst="roundRect">
             <a:avLst>
-              <a:gd name="adj" fmla="val 5217"/>
+              <a:gd name="adj" fmla="val 5714"/>
             </a:avLst>
           </a:prstGeom>
           <a:solidFill>
@@ -2575,14 +2641,14 @@
       </p:sp>
       <p:sp>
         <p:nvSpPr>
-          <p:cNvPr id="15" name="Text 13"/>
-          <p:cNvSpPr/>
-          <p:nvPr/>
-        </p:nvSpPr>
-        <p:spPr>
-          <a:xfrm>
-            <a:off x="5157216" y="4544568"/>
-            <a:ext cx="2011680" cy="457200"/>
+          <p:cNvPr id="17" name="Text 15"/>
+          <p:cNvSpPr/>
+          <p:nvPr/>
+        </p:nvSpPr>
+        <p:spPr>
+          <a:xfrm>
+            <a:off x="5157216" y="4754880"/>
+            <a:ext cx="2011680" cy="420624"/>
           </a:xfrm>
           <a:prstGeom prst="rect">
             <a:avLst/>
@@ -2598,7 +2664,7 @@
               <a:buNone/>
             </a:pPr>
             <a:r>
-              <a:rPr lang="en-US" sz="2600" b="1" dirty="0">
+              <a:rPr lang="en-US" sz="2400" b="1" dirty="0">
                 <a:solidFill>
                   <a:srgbClr val="0891B2"/>
                 </a:solidFill>
@@ -2608,19 +2674,19 @@
               </a:rPr>
               <a:t>5</a:t>
             </a:r>
-            <a:endParaRPr lang="en-US" sz="2600" dirty="0"/>
+            <a:endParaRPr lang="en-US" sz="2400" dirty="0"/>
           </a:p>
         </p:txBody>
       </p:sp>
       <p:sp>
         <p:nvSpPr>
-          <p:cNvPr id="16" name="Text 14"/>
-          <p:cNvSpPr/>
-          <p:nvPr/>
-        </p:nvSpPr>
-        <p:spPr>
-          <a:xfrm>
-            <a:off x="5157216" y="5001768"/>
+          <p:cNvPr id="18" name="Text 16"/>
+          <p:cNvSpPr/>
+          <p:nvPr/>
+        </p:nvSpPr>
+        <p:spPr>
+          <a:xfrm>
+            <a:off x="5157216" y="5175504"/>
             <a:ext cx="2011680" cy="274320"/>
           </a:xfrm>
           <a:prstGeom prst="rect">
@@ -2637,7 +2703,7 @@
               <a:buNone/>
             </a:pPr>
             <a:r>
-              <a:rPr lang="en-US" sz="900" dirty="0">
+              <a:rPr lang="en-US" sz="850" dirty="0">
                 <a:solidFill>
                   <a:srgbClr val="94A3B8"/>
                 </a:solidFill>
@@ -2647,24 +2713,24 @@
               </a:rPr>
               <a:t>Post-migration checks</a:t>
             </a:r>
-            <a:endParaRPr lang="en-US" sz="900" dirty="0"/>
+            <a:endParaRPr lang="en-US" sz="850" dirty="0"/>
           </a:p>
         </p:txBody>
       </p:sp>
       <p:sp>
         <p:nvSpPr>
-          <p:cNvPr id="17" name="Shape 15"/>
-          <p:cNvSpPr/>
-          <p:nvPr/>
-        </p:nvSpPr>
-        <p:spPr>
-          <a:xfrm>
-            <a:off x="7370064" y="4434840"/>
-            <a:ext cx="2011680" cy="1051560"/>
+          <p:cNvPr id="19" name="Shape 17"/>
+          <p:cNvSpPr/>
+          <p:nvPr/>
+        </p:nvSpPr>
+        <p:spPr>
+          <a:xfrm>
+            <a:off x="7370064" y="4681728"/>
+            <a:ext cx="2011680" cy="960120"/>
           </a:xfrm>
           <a:prstGeom prst="roundRect">
             <a:avLst>
-              <a:gd name="adj" fmla="val 5217"/>
+              <a:gd name="adj" fmla="val 5714"/>
             </a:avLst>
           </a:prstGeom>
           <a:solidFill>
@@ -2680,14 +2746,14 @@
       </p:sp>
       <p:sp>
         <p:nvSpPr>
-          <p:cNvPr id="18" name="Text 16"/>
-          <p:cNvSpPr/>
-          <p:nvPr/>
-        </p:nvSpPr>
-        <p:spPr>
-          <a:xfrm>
-            <a:off x="7370064" y="4544568"/>
-            <a:ext cx="2011680" cy="457200"/>
+          <p:cNvPr id="20" name="Text 18"/>
+          <p:cNvSpPr/>
+          <p:nvPr/>
+        </p:nvSpPr>
+        <p:spPr>
+          <a:xfrm>
+            <a:off x="7370064" y="4754880"/>
+            <a:ext cx="2011680" cy="420624"/>
           </a:xfrm>
           <a:prstGeom prst="rect">
             <a:avLst/>
@@ -2703,7 +2769,7 @@
               <a:buNone/>
             </a:pPr>
             <a:r>
-              <a:rPr lang="en-US" sz="2600" b="1" dirty="0">
+              <a:rPr lang="en-US" sz="2400" b="1" dirty="0">
                 <a:solidFill>
                   <a:srgbClr val="0891B2"/>
                 </a:solidFill>
@@ -2713,19 +2779,19 @@
               </a:rPr>
               <a:t>0</a:t>
             </a:r>
-            <a:endParaRPr lang="en-US" sz="2600" dirty="0"/>
+            <a:endParaRPr lang="en-US" sz="2400" dirty="0"/>
           </a:p>
         </p:txBody>
       </p:sp>
       <p:sp>
         <p:nvSpPr>
-          <p:cNvPr id="19" name="Text 17"/>
-          <p:cNvSpPr/>
-          <p:nvPr/>
-        </p:nvSpPr>
-        <p:spPr>
-          <a:xfrm>
-            <a:off x="7370064" y="5001768"/>
+          <p:cNvPr id="21" name="Text 19"/>
+          <p:cNvSpPr/>
+          <p:nvPr/>
+        </p:nvSpPr>
+        <p:spPr>
+          <a:xfrm>
+            <a:off x="7370064" y="5175504"/>
             <a:ext cx="2011680" cy="274320"/>
           </a:xfrm>
           <a:prstGeom prst="rect">
@@ -2742,7 +2808,7 @@
               <a:buNone/>
             </a:pPr>
             <a:r>
-              <a:rPr lang="en-US" sz="900" dirty="0">
+              <a:rPr lang="en-US" sz="850" dirty="0">
                 <a:solidFill>
                   <a:srgbClr val="94A3B8"/>
                 </a:solidFill>
@@ -2752,24 +2818,24 @@
               </a:rPr>
               <a:t>Source VMs deleted</a:t>
             </a:r>
-            <a:endParaRPr lang="en-US" sz="900" dirty="0"/>
+            <a:endParaRPr lang="en-US" sz="850" dirty="0"/>
           </a:p>
         </p:txBody>
       </p:sp>
       <p:sp>
         <p:nvSpPr>
-          <p:cNvPr id="20" name="Shape 18"/>
-          <p:cNvSpPr/>
-          <p:nvPr/>
-        </p:nvSpPr>
-        <p:spPr>
-          <a:xfrm>
-            <a:off x="9582912" y="4434840"/>
-            <a:ext cx="2011680" cy="1051560"/>
+          <p:cNvPr id="22" name="Shape 20"/>
+          <p:cNvSpPr/>
+          <p:nvPr/>
+        </p:nvSpPr>
+        <p:spPr>
+          <a:xfrm>
+            <a:off x="9582912" y="4681728"/>
+            <a:ext cx="2011680" cy="960120"/>
           </a:xfrm>
           <a:prstGeom prst="roundRect">
             <a:avLst>
-              <a:gd name="adj" fmla="val 5217"/>
+              <a:gd name="adj" fmla="val 5714"/>
             </a:avLst>
           </a:prstGeom>
           <a:solidFill>
@@ -2785,14 +2851,14 @@
       </p:sp>
       <p:sp>
         <p:nvSpPr>
-          <p:cNvPr id="21" name="Text 19"/>
-          <p:cNvSpPr/>
-          <p:nvPr/>
-        </p:nvSpPr>
-        <p:spPr>
-          <a:xfrm>
-            <a:off x="9582912" y="4544568"/>
-            <a:ext cx="2011680" cy="457200"/>
+          <p:cNvPr id="23" name="Text 21"/>
+          <p:cNvSpPr/>
+          <p:nvPr/>
+        </p:nvSpPr>
+        <p:spPr>
+          <a:xfrm>
+            <a:off x="9582912" y="4754880"/>
+            <a:ext cx="2011680" cy="420624"/>
           </a:xfrm>
           <a:prstGeom prst="rect">
             <a:avLst/>
@@ -2808,7 +2874,7 @@
               <a:buNone/>
             </a:pPr>
             <a:r>
-              <a:rPr lang="en-US" sz="2600" b="1" dirty="0">
+              <a:rPr lang="en-US" sz="2400" b="1" dirty="0">
                 <a:solidFill>
                   <a:srgbClr val="0891B2"/>
                 </a:solidFill>
@@ -2818,19 +2884,19 @@
               </a:rPr>
               <a:t>2</a:t>
             </a:r>
-            <a:endParaRPr lang="en-US" sz="2600" dirty="0"/>
+            <a:endParaRPr lang="en-US" sz="2400" dirty="0"/>
           </a:p>
         </p:txBody>
       </p:sp>
       <p:sp>
         <p:nvSpPr>
-          <p:cNvPr id="22" name="Text 20"/>
-          <p:cNvSpPr/>
-          <p:nvPr/>
-        </p:nvSpPr>
-        <p:spPr>
-          <a:xfrm>
-            <a:off x="9582912" y="5001768"/>
+          <p:cNvPr id="24" name="Text 22"/>
+          <p:cNvSpPr/>
+          <p:nvPr/>
+        </p:nvSpPr>
+        <p:spPr>
+          <a:xfrm>
+            <a:off x="9582912" y="5175504"/>
             <a:ext cx="2011680" cy="274320"/>
           </a:xfrm>
           <a:prstGeom prst="rect">
@@ -2847,7 +2913,7 @@
               <a:buNone/>
             </a:pPr>
             <a:r>
-              <a:rPr lang="en-US" sz="900" dirty="0">
+              <a:rPr lang="en-US" sz="850" dirty="0">
                 <a:solidFill>
                   <a:srgbClr val="94A3B8"/>
                 </a:solidFill>
@@ -2857,13 +2923,13 @@
               </a:rPr>
               <a:t>AI steps of 58</a:t>
             </a:r>
-            <a:endParaRPr lang="en-US" sz="900" dirty="0"/>
+            <a:endParaRPr lang="en-US" sz="850" dirty="0"/>
           </a:p>
         </p:txBody>
       </p:sp>
       <p:sp>
         <p:nvSpPr>
-          <p:cNvPr id="23" name="Text 21"/>
+          <p:cNvPr id="25" name="Text 23"/>
           <p:cNvSpPr/>
           <p:nvPr/>
         </p:nvSpPr>

--- a/usecases/uc-10-vm-migration/TCS-Agentic-AI-UC10-VM-Migration.pptx
+++ b/usecases/uc-10-vm-migration/TCS-Agentic-AI-UC10-VM-Migration.pptx
@@ -14241,7 +14241,7 @@
                 <a:ea typeface="Inter" pitchFamily="34" charset="-122"/>
                 <a:cs typeface="Inter" pitchFamily="34" charset="-120"/>
               </a:rPr>
-              <a:t>Six stages — and warm and cold are different routes</a:t>
+              <a:t>Seven stages for cold, eight for warm — they are different routes</a:t>
             </a:r>
             <a:endParaRPr lang="en-US" sz="2200" dirty="0"/>
           </a:p>

--- a/usecases/uc-10-vm-migration/TCS-Agentic-AI-UC10-VM-Migration.pptx
+++ b/usecases/uc-10-vm-migration/TCS-Agentic-AI-UC10-VM-Migration.pptx
@@ -2129,8 +2129,33 @@
         </p:nvSpPr>
         <p:spPr>
           <a:xfrm>
-            <a:off x="0" y="3035808"/>
-            <a:ext cx="12188952" cy="41148"/>
+            <a:off x="0" y="0"/>
+            <a:ext cx="64008" cy="2286000"/>
+          </a:xfrm>
+          <a:prstGeom prst="rect">
+            <a:avLst/>
+          </a:prstGeom>
+          <a:solidFill>
+            <a:srgbClr val="E04040"/>
+          </a:solidFill>
+          <a:ln w="12700">
+            <a:solidFill>
+              <a:srgbClr val="E04040"/>
+            </a:solidFill>
+            <a:prstDash val="solid"/>
+          </a:ln>
+        </p:spPr>
+      </p:sp>
+      <p:sp>
+        <p:nvSpPr>
+          <p:cNvPr id="3" name="Shape 1"/>
+          <p:cNvSpPr/>
+          <p:nvPr/>
+        </p:nvSpPr>
+        <p:spPr>
+          <a:xfrm>
+            <a:off x="0" y="2286000"/>
+            <a:ext cx="64008" cy="2286000"/>
           </a:xfrm>
           <a:prstGeom prst="rect">
             <a:avLst/>
@@ -2138,19 +2163,49 @@
           <a:solidFill>
             <a:srgbClr val="2563EB"/>
           </a:solidFill>
-          <a:ln/>
-        </p:spPr>
-      </p:sp>
-      <p:sp>
-        <p:nvSpPr>
-          <p:cNvPr id="3" name="Text 1"/>
-          <p:cNvSpPr/>
-          <p:nvPr/>
-        </p:nvSpPr>
-        <p:spPr>
-          <a:xfrm>
-            <a:off x="731520" y="1481328"/>
-            <a:ext cx="7315200" cy="274320"/>
+          <a:ln w="12700">
+            <a:solidFill>
+              <a:srgbClr val="2563EB"/>
+            </a:solidFill>
+            <a:prstDash val="solid"/>
+          </a:ln>
+        </p:spPr>
+      </p:sp>
+      <p:sp>
+        <p:nvSpPr>
+          <p:cNvPr id="4" name="Shape 2"/>
+          <p:cNvSpPr/>
+          <p:nvPr/>
+        </p:nvSpPr>
+        <p:spPr>
+          <a:xfrm>
+            <a:off x="0" y="4572000"/>
+            <a:ext cx="64008" cy="2286000"/>
+          </a:xfrm>
+          <a:prstGeom prst="rect">
+            <a:avLst/>
+          </a:prstGeom>
+          <a:solidFill>
+            <a:srgbClr val="0891B2"/>
+          </a:solidFill>
+          <a:ln w="12700">
+            <a:solidFill>
+              <a:srgbClr val="0891B2"/>
+            </a:solidFill>
+            <a:prstDash val="solid"/>
+          </a:ln>
+        </p:spPr>
+      </p:sp>
+      <p:sp>
+        <p:nvSpPr>
+          <p:cNvPr id="5" name="Text 3"/>
+          <p:cNvSpPr/>
+          <p:nvPr/>
+        </p:nvSpPr>
+        <p:spPr>
+          <a:xfrm>
+            <a:off x="868680" y="2395728"/>
+            <a:ext cx="10058400" cy="274320"/>
           </a:xfrm>
           <a:prstGeom prst="rect">
             <a:avLst/>
@@ -2166,30 +2221,30 @@
               <a:buNone/>
             </a:pPr>
             <a:r>
-              <a:rPr lang="en-US" sz="1300" b="1" spc="300" kern="0" dirty="0">
+              <a:rPr lang="en-US" sz="1150" b="1" spc="300" kern="0" dirty="0">
                 <a:solidFill>
-                  <a:srgbClr val="0891B2"/>
+                  <a:srgbClr val="38BDF8"/>
                 </a:solidFill>
                 <a:latin typeface="Inter" pitchFamily="34" charset="0"/>
                 <a:ea typeface="Inter" pitchFamily="34" charset="-122"/>
                 <a:cs typeface="Inter" pitchFamily="34" charset="-120"/>
               </a:rPr>
-              <a:t>TCS AGENTIC AI   ·   USE CASE 10</a:t>
+              <a:t>USE CASE 10        |        VIRTUALIZATION OPERATIONS</a:t>
             </a:r>
-            <a:endParaRPr lang="en-US" sz="1300" dirty="0"/>
+            <a:endParaRPr lang="en-US" sz="1150" dirty="0"/>
           </a:p>
         </p:txBody>
       </p:sp>
       <p:sp>
         <p:nvSpPr>
-          <p:cNvPr id="4" name="Text 2"/>
-          <p:cNvSpPr/>
-          <p:nvPr/>
-        </p:nvSpPr>
-        <p:spPr>
-          <a:xfrm>
-            <a:off x="731520" y="1755648"/>
-            <a:ext cx="10881360" cy="658368"/>
+          <p:cNvPr id="6" name="Text 4"/>
+          <p:cNvSpPr/>
+          <p:nvPr/>
+        </p:nvSpPr>
+        <p:spPr>
+          <a:xfrm>
+            <a:off x="868680" y="2761488"/>
+            <a:ext cx="10058400" cy="329184"/>
           </a:xfrm>
           <a:prstGeom prst="rect">
             <a:avLst/>
@@ -2205,7 +2260,60 @@
               <a:buNone/>
             </a:pPr>
             <a:r>
-              <a:rPr lang="en-US" sz="3700" b="1" dirty="0">
+              <a:rPr lang="en-US" sz="1700" b="1" spc="160" kern="0" dirty="0">
+                <a:solidFill>
+                  <a:srgbClr val="E04040"/>
+                </a:solidFill>
+                <a:latin typeface="Inter" pitchFamily="34" charset="0"/>
+                <a:ea typeface="Inter" pitchFamily="34" charset="-122"/>
+                <a:cs typeface="Inter" pitchFamily="34" charset="-120"/>
+              </a:rPr>
+              <a:t>TCS</a:t>
+            </a:r>
+            <a:pPr indent="0" marL="0">
+              <a:buNone/>
+            </a:pPr>
+            <a:r>
+              <a:rPr lang="en-US" sz="1700" b="1" dirty="0">
+                <a:solidFill>
+                  <a:srgbClr val="CBD5E1"/>
+                </a:solidFill>
+                <a:latin typeface="Inter" pitchFamily="34" charset="0"/>
+                <a:ea typeface="Inter" pitchFamily="34" charset="-122"/>
+                <a:cs typeface="Inter" pitchFamily="34" charset="-120"/>
+              </a:rPr>
+              <a:t>   Agentic AI for Hybrid Infrastructure</a:t>
+            </a:r>
+            <a:endParaRPr lang="en-US" sz="1700" dirty="0"/>
+          </a:p>
+        </p:txBody>
+      </p:sp>
+      <p:sp>
+        <p:nvSpPr>
+          <p:cNvPr id="7" name="Text 5"/>
+          <p:cNvSpPr/>
+          <p:nvPr/>
+        </p:nvSpPr>
+        <p:spPr>
+          <a:xfrm>
+            <a:off x="841248" y="3127248"/>
+            <a:ext cx="10972800" cy="868680"/>
+          </a:xfrm>
+          <a:prstGeom prst="rect">
+            <a:avLst/>
+          </a:prstGeom>
+          <a:noFill/>
+          <a:ln/>
+        </p:spPr>
+        <p:txBody>
+          <a:bodyPr wrap="square" rtlCol="0" anchor="ctr"/>
+          <a:lstStyle/>
+          <a:p>
+            <a:pPr indent="0" marL="0">
+              <a:buNone/>
+            </a:pPr>
+            <a:r>
+              <a:rPr lang="en-US" sz="4700" b="1" spc="-120" kern="0" dirty="0">
                 <a:solidFill>
                   <a:srgbClr val="FFFFFF"/>
                 </a:solidFill>
@@ -2213,22 +2321,22 @@
                 <a:ea typeface="Inter" pitchFamily="34" charset="-122"/>
                 <a:cs typeface="Inter" pitchFamily="34" charset="-120"/>
               </a:rPr>
-              <a:t>VM Migration Assurance</a:t>
+              <a:t>AI-led Migration Factory</a:t>
             </a:r>
-            <a:endParaRPr lang="en-US" sz="3700" dirty="0"/>
+            <a:endParaRPr lang="en-US" sz="4700" dirty="0"/>
           </a:p>
         </p:txBody>
       </p:sp>
       <p:sp>
         <p:nvSpPr>
-          <p:cNvPr id="5" name="Text 3"/>
-          <p:cNvSpPr/>
-          <p:nvPr/>
-        </p:nvSpPr>
-        <p:spPr>
-          <a:xfrm>
-            <a:off x="731520" y="2395728"/>
-            <a:ext cx="10881360" cy="457200"/>
+          <p:cNvPr id="8" name="Text 6"/>
+          <p:cNvSpPr/>
+          <p:nvPr/>
+        </p:nvSpPr>
+        <p:spPr>
+          <a:xfrm>
+            <a:off x="868680" y="4041648"/>
+            <a:ext cx="10972800" cy="502920"/>
           </a:xfrm>
           <a:prstGeom prst="rect">
             <a:avLst/>
@@ -2244,30 +2352,82 @@
               <a:buNone/>
             </a:pPr>
             <a:r>
-              <a:rPr lang="en-US" sz="2100" dirty="0">
+              <a:rPr lang="en-US" sz="2400" dirty="0">
                 <a:solidFill>
-                  <a:srgbClr val="0891B2"/>
+                  <a:srgbClr val="93C5FD"/>
                 </a:solidFill>
                 <a:latin typeface="Inter" pitchFamily="34" charset="0"/>
                 <a:ea typeface="Inter" pitchFamily="34" charset="-122"/>
                 <a:cs typeface="Inter" pitchFamily="34" charset="-120"/>
               </a:rPr>
-              <a:t>VMware  →  OpenShift Virtualization</a:t>
+              <a:t>VMware to OpenShift Virtualization</a:t>
             </a:r>
-            <a:endParaRPr lang="en-US" sz="2100" dirty="0"/>
+            <a:endParaRPr lang="en-US" sz="2400" dirty="0"/>
           </a:p>
         </p:txBody>
       </p:sp>
       <p:sp>
         <p:nvSpPr>
-          <p:cNvPr id="6" name="Text 4"/>
-          <p:cNvSpPr/>
-          <p:nvPr/>
-        </p:nvSpPr>
-        <p:spPr>
-          <a:xfrm>
-            <a:off x="731520" y="3200400"/>
-            <a:ext cx="10607040" cy="365760"/>
+          <p:cNvPr id="9" name="Shape 7"/>
+          <p:cNvSpPr/>
+          <p:nvPr/>
+        </p:nvSpPr>
+        <p:spPr>
+          <a:xfrm>
+            <a:off x="868680" y="4773168"/>
+            <a:ext cx="914400" cy="41148"/>
+          </a:xfrm>
+          <a:prstGeom prst="roundRect">
+            <a:avLst>
+              <a:gd name="adj" fmla="val 44444"/>
+            </a:avLst>
+          </a:prstGeom>
+          <a:solidFill>
+            <a:srgbClr val="2563EB"/>
+          </a:solidFill>
+          <a:ln w="12700">
+            <a:solidFill>
+              <a:srgbClr val="2563EB"/>
+            </a:solidFill>
+            <a:prstDash val="solid"/>
+          </a:ln>
+        </p:spPr>
+      </p:sp>
+      <p:sp>
+        <p:nvSpPr>
+          <p:cNvPr id="10" name="Shape 8"/>
+          <p:cNvSpPr/>
+          <p:nvPr/>
+        </p:nvSpPr>
+        <p:spPr>
+          <a:xfrm>
+            <a:off x="868680" y="6053328"/>
+            <a:ext cx="10451592" cy="10973"/>
+          </a:xfrm>
+          <a:prstGeom prst="rect">
+            <a:avLst/>
+          </a:prstGeom>
+          <a:solidFill>
+            <a:srgbClr val="1E293B"/>
+          </a:solidFill>
+          <a:ln w="12700">
+            <a:solidFill>
+              <a:srgbClr val="1E293B"/>
+            </a:solidFill>
+            <a:prstDash val="solid"/>
+          </a:ln>
+        </p:spPr>
+      </p:sp>
+      <p:sp>
+        <p:nvSpPr>
+          <p:cNvPr id="11" name="Text 9"/>
+          <p:cNvSpPr/>
+          <p:nvPr/>
+        </p:nvSpPr>
+        <p:spPr>
+          <a:xfrm>
+            <a:off x="868680" y="6181344"/>
+            <a:ext cx="7315200" cy="256032"/>
           </a:xfrm>
           <a:prstGeom prst="rect">
             <a:avLst/>
@@ -2283,7 +2443,7 @@
               <a:buNone/>
             </a:pPr>
             <a:r>
-              <a:rPr lang="en-US" sz="1550" dirty="0">
+              <a:rPr lang="en-US" sz="1050" b="1" dirty="0">
                 <a:solidFill>
                   <a:srgbClr val="94A3B8"/>
                 </a:solidFill>
@@ -2291,668 +2451,13 @@
                 <a:ea typeface="Inter" pitchFamily="34" charset="-122"/>
                 <a:cs typeface="Inter" pitchFamily="34" charset="-120"/>
               </a:rPr>
-              <a:t>VM Migration Agent  ·  assess against the target, govern the change, prove the result</a:t>
+              <a:t>Tata Consultancy Services</a:t>
             </a:r>
-            <a:endParaRPr lang="en-US" sz="1550" dirty="0"/>
-          </a:p>
-        </p:txBody>
-      </p:sp>
-      <p:sp>
-        <p:nvSpPr>
-          <p:cNvPr id="7" name="Text 5"/>
-          <p:cNvSpPr/>
-          <p:nvPr/>
-        </p:nvSpPr>
-        <p:spPr>
-          <a:xfrm>
-            <a:off x="731520" y="3703320"/>
-            <a:ext cx="10607040" cy="365760"/>
-          </a:xfrm>
-          <a:prstGeom prst="rect">
-            <a:avLst/>
-          </a:prstGeom>
-          <a:noFill/>
-          <a:ln/>
-        </p:spPr>
-        <p:txBody>
-          <a:bodyPr wrap="square" rtlCol="0" anchor="ctr"/>
-          <a:lstStyle/>
-          <a:p>
-            <a:pPr indent="0" marL="0">
-              <a:buNone/>
-            </a:pPr>
-            <a:r>
-              <a:rPr lang="en-US" sz="1500" i="1" dirty="0">
-                <a:solidFill>
-                  <a:srgbClr val="FEF3C7"/>
-                </a:solidFill>
-                <a:latin typeface="Inter" pitchFamily="34" charset="0"/>
-                <a:ea typeface="Inter" pitchFamily="34" charset="-122"/>
-                <a:cs typeface="Inter" pitchFamily="34" charset="-120"/>
-              </a:rPr>
-              <a:t>“Every other tool reads the source. This one runs inside the destination.”</a:t>
-            </a:r>
-            <a:endParaRPr lang="en-US" sz="1500" dirty="0"/>
-          </a:p>
-        </p:txBody>
-      </p:sp>
-      <p:sp>
-        <p:nvSpPr>
-          <p:cNvPr id="8" name="Shape 6"/>
-          <p:cNvSpPr/>
-          <p:nvPr/>
-        </p:nvSpPr>
-        <p:spPr>
-          <a:xfrm>
-            <a:off x="731520" y="4160520"/>
-            <a:ext cx="10607040" cy="384048"/>
-          </a:xfrm>
-          <a:prstGeom prst="roundRect">
-            <a:avLst>
-              <a:gd name="adj" fmla="val 11905"/>
-            </a:avLst>
-          </a:prstGeom>
-          <a:solidFill>
-            <a:srgbClr val="1E293B"/>
-          </a:solidFill>
-          <a:ln w="12700">
-            <a:solidFill>
-              <a:srgbClr val="334155"/>
-            </a:solidFill>
-            <a:prstDash val="solid"/>
-          </a:ln>
-        </p:spPr>
-      </p:sp>
-      <p:sp>
-        <p:nvSpPr>
-          <p:cNvPr id="9" name="Text 7"/>
-          <p:cNvSpPr/>
-          <p:nvPr/>
-        </p:nvSpPr>
-        <p:spPr>
-          <a:xfrm>
-            <a:off x="868680" y="4160520"/>
-            <a:ext cx="10332720" cy="384048"/>
-          </a:xfrm>
-          <a:prstGeom prst="rect">
-            <a:avLst/>
-          </a:prstGeom>
-          <a:noFill/>
-          <a:ln/>
-        </p:spPr>
-        <p:txBody>
-          <a:bodyPr wrap="square" rtlCol="0" anchor="ctr"/>
-          <a:lstStyle/>
-          <a:p>
             <a:pPr indent="0" marL="0">
               <a:buNone/>
             </a:pPr>
             <a:r>
               <a:rPr lang="en-US" sz="1050" dirty="0">
-                <a:solidFill>
-                  <a:srgbClr val="CBD5E1"/>
-                </a:solidFill>
-                <a:latin typeface="Inter" pitchFamily="34" charset="0"/>
-                <a:ea typeface="Inter" pitchFamily="34" charset="-122"/>
-                <a:cs typeface="Inter" pitchFamily="34" charset="-120"/>
-              </a:rPr>
-              <a:t>SCOPE   ·   VMs that ALREADY EXIST on VMware and are moving to OpenShift Virtualization.      Once landed, they are governed by UC-06, VM Lifecycle.</a:t>
-            </a:r>
-            <a:endParaRPr lang="en-US" sz="1050" dirty="0"/>
-          </a:p>
-        </p:txBody>
-      </p:sp>
-      <p:sp>
-        <p:nvSpPr>
-          <p:cNvPr id="10" name="Shape 8"/>
-          <p:cNvSpPr/>
-          <p:nvPr/>
-        </p:nvSpPr>
-        <p:spPr>
-          <a:xfrm>
-            <a:off x="731520" y="4681728"/>
-            <a:ext cx="2011680" cy="960120"/>
-          </a:xfrm>
-          <a:prstGeom prst="roundRect">
-            <a:avLst>
-              <a:gd name="adj" fmla="val 5714"/>
-            </a:avLst>
-          </a:prstGeom>
-          <a:solidFill>
-            <a:srgbClr val="1E293B"/>
-          </a:solidFill>
-          <a:ln w="12700">
-            <a:solidFill>
-              <a:srgbClr val="334155"/>
-            </a:solidFill>
-            <a:prstDash val="solid"/>
-          </a:ln>
-        </p:spPr>
-      </p:sp>
-      <p:sp>
-        <p:nvSpPr>
-          <p:cNvPr id="11" name="Text 9"/>
-          <p:cNvSpPr/>
-          <p:nvPr/>
-        </p:nvSpPr>
-        <p:spPr>
-          <a:xfrm>
-            <a:off x="731520" y="4754880"/>
-            <a:ext cx="2011680" cy="420624"/>
-          </a:xfrm>
-          <a:prstGeom prst="rect">
-            <a:avLst/>
-          </a:prstGeom>
-          <a:noFill/>
-          <a:ln/>
-        </p:spPr>
-        <p:txBody>
-          <a:bodyPr wrap="square" rtlCol="0" anchor="ctr"/>
-          <a:lstStyle/>
-          <a:p>
-            <a:pPr algn="ctr" indent="0" marL="0">
-              <a:buNone/>
-            </a:pPr>
-            <a:r>
-              <a:rPr lang="en-US" sz="2400" b="1" dirty="0">
-                <a:solidFill>
-                  <a:srgbClr val="0891B2"/>
-                </a:solidFill>
-                <a:latin typeface="Inter" pitchFamily="34" charset="0"/>
-                <a:ea typeface="Inter" pitchFamily="34" charset="-122"/>
-                <a:cs typeface="Inter" pitchFamily="34" charset="-120"/>
-              </a:rPr>
-              <a:t>9</a:t>
-            </a:r>
-            <a:endParaRPr lang="en-US" sz="2400" dirty="0"/>
-          </a:p>
-        </p:txBody>
-      </p:sp>
-      <p:sp>
-        <p:nvSpPr>
-          <p:cNvPr id="12" name="Text 10"/>
-          <p:cNvSpPr/>
-          <p:nvPr/>
-        </p:nvSpPr>
-        <p:spPr>
-          <a:xfrm>
-            <a:off x="731520" y="5175504"/>
-            <a:ext cx="2011680" cy="274320"/>
-          </a:xfrm>
-          <a:prstGeom prst="rect">
-            <a:avLst/>
-          </a:prstGeom>
-          <a:noFill/>
-          <a:ln/>
-        </p:spPr>
-        <p:txBody>
-          <a:bodyPr wrap="square" rtlCol="0" anchor="ctr"/>
-          <a:lstStyle/>
-          <a:p>
-            <a:pPr algn="ctr" indent="0" marL="0">
-              <a:buNone/>
-            </a:pPr>
-            <a:r>
-              <a:rPr lang="en-US" sz="850" dirty="0">
-                <a:solidFill>
-                  <a:srgbClr val="94A3B8"/>
-                </a:solidFill>
-                <a:latin typeface="Inter" pitchFamily="34" charset="0"/>
-                <a:ea typeface="Inter" pitchFamily="34" charset="-122"/>
-                <a:cs typeface="Inter" pitchFamily="34" charset="-120"/>
-              </a:rPr>
-              <a:t>Stages, end to end</a:t>
-            </a:r>
-            <a:endParaRPr lang="en-US" sz="850" dirty="0"/>
-          </a:p>
-        </p:txBody>
-      </p:sp>
-      <p:sp>
-        <p:nvSpPr>
-          <p:cNvPr id="13" name="Shape 11"/>
-          <p:cNvSpPr/>
-          <p:nvPr/>
-        </p:nvSpPr>
-        <p:spPr>
-          <a:xfrm>
-            <a:off x="2944368" y="4681728"/>
-            <a:ext cx="2011680" cy="960120"/>
-          </a:xfrm>
-          <a:prstGeom prst="roundRect">
-            <a:avLst>
-              <a:gd name="adj" fmla="val 5714"/>
-            </a:avLst>
-          </a:prstGeom>
-          <a:solidFill>
-            <a:srgbClr val="1E293B"/>
-          </a:solidFill>
-          <a:ln w="12700">
-            <a:solidFill>
-              <a:srgbClr val="334155"/>
-            </a:solidFill>
-            <a:prstDash val="solid"/>
-          </a:ln>
-        </p:spPr>
-      </p:sp>
-      <p:sp>
-        <p:nvSpPr>
-          <p:cNvPr id="14" name="Text 12"/>
-          <p:cNvSpPr/>
-          <p:nvPr/>
-        </p:nvSpPr>
-        <p:spPr>
-          <a:xfrm>
-            <a:off x="2944368" y="4754880"/>
-            <a:ext cx="2011680" cy="420624"/>
-          </a:xfrm>
-          <a:prstGeom prst="rect">
-            <a:avLst/>
-          </a:prstGeom>
-          <a:noFill/>
-          <a:ln/>
-        </p:spPr>
-        <p:txBody>
-          <a:bodyPr wrap="square" rtlCol="0" anchor="ctr"/>
-          <a:lstStyle/>
-          <a:p>
-            <a:pPr algn="ctr" indent="0" marL="0">
-              <a:buNone/>
-            </a:pPr>
-            <a:r>
-              <a:rPr lang="en-US" sz="2400" b="1" dirty="0">
-                <a:solidFill>
-                  <a:srgbClr val="0891B2"/>
-                </a:solidFill>
-                <a:latin typeface="Inter" pitchFamily="34" charset="0"/>
-                <a:ea typeface="Inter" pitchFamily="34" charset="-122"/>
-                <a:cs typeface="Inter" pitchFamily="34" charset="-120"/>
-              </a:rPr>
-              <a:t>15</a:t>
-            </a:r>
-            <a:endParaRPr lang="en-US" sz="2400" dirty="0"/>
-          </a:p>
-        </p:txBody>
-      </p:sp>
-      <p:sp>
-        <p:nvSpPr>
-          <p:cNvPr id="15" name="Text 13"/>
-          <p:cNvSpPr/>
-          <p:nvPr/>
-        </p:nvSpPr>
-        <p:spPr>
-          <a:xfrm>
-            <a:off x="2944368" y="5175504"/>
-            <a:ext cx="2011680" cy="274320"/>
-          </a:xfrm>
-          <a:prstGeom prst="rect">
-            <a:avLst/>
-          </a:prstGeom>
-          <a:noFill/>
-          <a:ln/>
-        </p:spPr>
-        <p:txBody>
-          <a:bodyPr wrap="square" rtlCol="0" anchor="ctr"/>
-          <a:lstStyle/>
-          <a:p>
-            <a:pPr algn="ctr" indent="0" marL="0">
-              <a:buNone/>
-            </a:pPr>
-            <a:r>
-              <a:rPr lang="en-US" sz="850" dirty="0">
-                <a:solidFill>
-                  <a:srgbClr val="94A3B8"/>
-                </a:solidFill>
-                <a:latin typeface="Inter" pitchFamily="34" charset="0"/>
-                <a:ea typeface="Inter" pitchFamily="34" charset="-122"/>
-                <a:cs typeface="Inter" pitchFamily="34" charset="-120"/>
-              </a:rPr>
-              <a:t>Source-side checks</a:t>
-            </a:r>
-            <a:endParaRPr lang="en-US" sz="850" dirty="0"/>
-          </a:p>
-        </p:txBody>
-      </p:sp>
-      <p:sp>
-        <p:nvSpPr>
-          <p:cNvPr id="16" name="Shape 14"/>
-          <p:cNvSpPr/>
-          <p:nvPr/>
-        </p:nvSpPr>
-        <p:spPr>
-          <a:xfrm>
-            <a:off x="5157216" y="4681728"/>
-            <a:ext cx="2011680" cy="960120"/>
-          </a:xfrm>
-          <a:prstGeom prst="roundRect">
-            <a:avLst>
-              <a:gd name="adj" fmla="val 5714"/>
-            </a:avLst>
-          </a:prstGeom>
-          <a:solidFill>
-            <a:srgbClr val="1E293B"/>
-          </a:solidFill>
-          <a:ln w="12700">
-            <a:solidFill>
-              <a:srgbClr val="334155"/>
-            </a:solidFill>
-            <a:prstDash val="solid"/>
-          </a:ln>
-        </p:spPr>
-      </p:sp>
-      <p:sp>
-        <p:nvSpPr>
-          <p:cNvPr id="17" name="Text 15"/>
-          <p:cNvSpPr/>
-          <p:nvPr/>
-        </p:nvSpPr>
-        <p:spPr>
-          <a:xfrm>
-            <a:off x="5157216" y="4754880"/>
-            <a:ext cx="2011680" cy="420624"/>
-          </a:xfrm>
-          <a:prstGeom prst="rect">
-            <a:avLst/>
-          </a:prstGeom>
-          <a:noFill/>
-          <a:ln/>
-        </p:spPr>
-        <p:txBody>
-          <a:bodyPr wrap="square" rtlCol="0" anchor="ctr"/>
-          <a:lstStyle/>
-          <a:p>
-            <a:pPr algn="ctr" indent="0" marL="0">
-              <a:buNone/>
-            </a:pPr>
-            <a:r>
-              <a:rPr lang="en-US" sz="2400" b="1" dirty="0">
-                <a:solidFill>
-                  <a:srgbClr val="0891B2"/>
-                </a:solidFill>
-                <a:latin typeface="Inter" pitchFamily="34" charset="0"/>
-                <a:ea typeface="Inter" pitchFamily="34" charset="-122"/>
-                <a:cs typeface="Inter" pitchFamily="34" charset="-120"/>
-              </a:rPr>
-              <a:t>5</a:t>
-            </a:r>
-            <a:endParaRPr lang="en-US" sz="2400" dirty="0"/>
-          </a:p>
-        </p:txBody>
-      </p:sp>
-      <p:sp>
-        <p:nvSpPr>
-          <p:cNvPr id="18" name="Text 16"/>
-          <p:cNvSpPr/>
-          <p:nvPr/>
-        </p:nvSpPr>
-        <p:spPr>
-          <a:xfrm>
-            <a:off x="5157216" y="5175504"/>
-            <a:ext cx="2011680" cy="274320"/>
-          </a:xfrm>
-          <a:prstGeom prst="rect">
-            <a:avLst/>
-          </a:prstGeom>
-          <a:noFill/>
-          <a:ln/>
-        </p:spPr>
-        <p:txBody>
-          <a:bodyPr wrap="square" rtlCol="0" anchor="ctr"/>
-          <a:lstStyle/>
-          <a:p>
-            <a:pPr algn="ctr" indent="0" marL="0">
-              <a:buNone/>
-            </a:pPr>
-            <a:r>
-              <a:rPr lang="en-US" sz="850" dirty="0">
-                <a:solidFill>
-                  <a:srgbClr val="94A3B8"/>
-                </a:solidFill>
-                <a:latin typeface="Inter" pitchFamily="34" charset="0"/>
-                <a:ea typeface="Inter" pitchFamily="34" charset="-122"/>
-                <a:cs typeface="Inter" pitchFamily="34" charset="-120"/>
-              </a:rPr>
-              <a:t>Post-migration checks</a:t>
-            </a:r>
-            <a:endParaRPr lang="en-US" sz="850" dirty="0"/>
-          </a:p>
-        </p:txBody>
-      </p:sp>
-      <p:sp>
-        <p:nvSpPr>
-          <p:cNvPr id="19" name="Shape 17"/>
-          <p:cNvSpPr/>
-          <p:nvPr/>
-        </p:nvSpPr>
-        <p:spPr>
-          <a:xfrm>
-            <a:off x="7370064" y="4681728"/>
-            <a:ext cx="2011680" cy="960120"/>
-          </a:xfrm>
-          <a:prstGeom prst="roundRect">
-            <a:avLst>
-              <a:gd name="adj" fmla="val 5714"/>
-            </a:avLst>
-          </a:prstGeom>
-          <a:solidFill>
-            <a:srgbClr val="1E293B"/>
-          </a:solidFill>
-          <a:ln w="12700">
-            <a:solidFill>
-              <a:srgbClr val="334155"/>
-            </a:solidFill>
-            <a:prstDash val="solid"/>
-          </a:ln>
-        </p:spPr>
-      </p:sp>
-      <p:sp>
-        <p:nvSpPr>
-          <p:cNvPr id="20" name="Text 18"/>
-          <p:cNvSpPr/>
-          <p:nvPr/>
-        </p:nvSpPr>
-        <p:spPr>
-          <a:xfrm>
-            <a:off x="7370064" y="4754880"/>
-            <a:ext cx="2011680" cy="420624"/>
-          </a:xfrm>
-          <a:prstGeom prst="rect">
-            <a:avLst/>
-          </a:prstGeom>
-          <a:noFill/>
-          <a:ln/>
-        </p:spPr>
-        <p:txBody>
-          <a:bodyPr wrap="square" rtlCol="0" anchor="ctr"/>
-          <a:lstStyle/>
-          <a:p>
-            <a:pPr algn="ctr" indent="0" marL="0">
-              <a:buNone/>
-            </a:pPr>
-            <a:r>
-              <a:rPr lang="en-US" sz="2400" b="1" dirty="0">
-                <a:solidFill>
-                  <a:srgbClr val="0891B2"/>
-                </a:solidFill>
-                <a:latin typeface="Inter" pitchFamily="34" charset="0"/>
-                <a:ea typeface="Inter" pitchFamily="34" charset="-122"/>
-                <a:cs typeface="Inter" pitchFamily="34" charset="-120"/>
-              </a:rPr>
-              <a:t>0</a:t>
-            </a:r>
-            <a:endParaRPr lang="en-US" sz="2400" dirty="0"/>
-          </a:p>
-        </p:txBody>
-      </p:sp>
-      <p:sp>
-        <p:nvSpPr>
-          <p:cNvPr id="21" name="Text 19"/>
-          <p:cNvSpPr/>
-          <p:nvPr/>
-        </p:nvSpPr>
-        <p:spPr>
-          <a:xfrm>
-            <a:off x="7370064" y="5175504"/>
-            <a:ext cx="2011680" cy="274320"/>
-          </a:xfrm>
-          <a:prstGeom prst="rect">
-            <a:avLst/>
-          </a:prstGeom>
-          <a:noFill/>
-          <a:ln/>
-        </p:spPr>
-        <p:txBody>
-          <a:bodyPr wrap="square" rtlCol="0" anchor="ctr"/>
-          <a:lstStyle/>
-          <a:p>
-            <a:pPr algn="ctr" indent="0" marL="0">
-              <a:buNone/>
-            </a:pPr>
-            <a:r>
-              <a:rPr lang="en-US" sz="850" dirty="0">
-                <a:solidFill>
-                  <a:srgbClr val="94A3B8"/>
-                </a:solidFill>
-                <a:latin typeface="Inter" pitchFamily="34" charset="0"/>
-                <a:ea typeface="Inter" pitchFamily="34" charset="-122"/>
-                <a:cs typeface="Inter" pitchFamily="34" charset="-120"/>
-              </a:rPr>
-              <a:t>Source VMs deleted</a:t>
-            </a:r>
-            <a:endParaRPr lang="en-US" sz="850" dirty="0"/>
-          </a:p>
-        </p:txBody>
-      </p:sp>
-      <p:sp>
-        <p:nvSpPr>
-          <p:cNvPr id="22" name="Shape 20"/>
-          <p:cNvSpPr/>
-          <p:nvPr/>
-        </p:nvSpPr>
-        <p:spPr>
-          <a:xfrm>
-            <a:off x="9582912" y="4681728"/>
-            <a:ext cx="2011680" cy="960120"/>
-          </a:xfrm>
-          <a:prstGeom prst="roundRect">
-            <a:avLst>
-              <a:gd name="adj" fmla="val 5714"/>
-            </a:avLst>
-          </a:prstGeom>
-          <a:solidFill>
-            <a:srgbClr val="1E293B"/>
-          </a:solidFill>
-          <a:ln w="12700">
-            <a:solidFill>
-              <a:srgbClr val="334155"/>
-            </a:solidFill>
-            <a:prstDash val="solid"/>
-          </a:ln>
-        </p:spPr>
-      </p:sp>
-      <p:sp>
-        <p:nvSpPr>
-          <p:cNvPr id="23" name="Text 21"/>
-          <p:cNvSpPr/>
-          <p:nvPr/>
-        </p:nvSpPr>
-        <p:spPr>
-          <a:xfrm>
-            <a:off x="9582912" y="4754880"/>
-            <a:ext cx="2011680" cy="420624"/>
-          </a:xfrm>
-          <a:prstGeom prst="rect">
-            <a:avLst/>
-          </a:prstGeom>
-          <a:noFill/>
-          <a:ln/>
-        </p:spPr>
-        <p:txBody>
-          <a:bodyPr wrap="square" rtlCol="0" anchor="ctr"/>
-          <a:lstStyle/>
-          <a:p>
-            <a:pPr algn="ctr" indent="0" marL="0">
-              <a:buNone/>
-            </a:pPr>
-            <a:r>
-              <a:rPr lang="en-US" sz="2400" b="1" dirty="0">
-                <a:solidFill>
-                  <a:srgbClr val="0891B2"/>
-                </a:solidFill>
-                <a:latin typeface="Inter" pitchFamily="34" charset="0"/>
-                <a:ea typeface="Inter" pitchFamily="34" charset="-122"/>
-                <a:cs typeface="Inter" pitchFamily="34" charset="-120"/>
-              </a:rPr>
-              <a:t>2</a:t>
-            </a:r>
-            <a:endParaRPr lang="en-US" sz="2400" dirty="0"/>
-          </a:p>
-        </p:txBody>
-      </p:sp>
-      <p:sp>
-        <p:nvSpPr>
-          <p:cNvPr id="24" name="Text 22"/>
-          <p:cNvSpPr/>
-          <p:nvPr/>
-        </p:nvSpPr>
-        <p:spPr>
-          <a:xfrm>
-            <a:off x="9582912" y="5175504"/>
-            <a:ext cx="2011680" cy="274320"/>
-          </a:xfrm>
-          <a:prstGeom prst="rect">
-            <a:avLst/>
-          </a:prstGeom>
-          <a:noFill/>
-          <a:ln/>
-        </p:spPr>
-        <p:txBody>
-          <a:bodyPr wrap="square" rtlCol="0" anchor="ctr"/>
-          <a:lstStyle/>
-          <a:p>
-            <a:pPr algn="ctr" indent="0" marL="0">
-              <a:buNone/>
-            </a:pPr>
-            <a:r>
-              <a:rPr lang="en-US" sz="850" dirty="0">
-                <a:solidFill>
-                  <a:srgbClr val="94A3B8"/>
-                </a:solidFill>
-                <a:latin typeface="Inter" pitchFamily="34" charset="0"/>
-                <a:ea typeface="Inter" pitchFamily="34" charset="-122"/>
-                <a:cs typeface="Inter" pitchFamily="34" charset="-120"/>
-              </a:rPr>
-              <a:t>AI steps of 58</a:t>
-            </a:r>
-            <a:endParaRPr lang="en-US" sz="850" dirty="0"/>
-          </a:p>
-        </p:txBody>
-      </p:sp>
-      <p:sp>
-        <p:nvSpPr>
-          <p:cNvPr id="25" name="Text 23"/>
-          <p:cNvSpPr/>
-          <p:nvPr/>
-        </p:nvSpPr>
-        <p:spPr>
-          <a:xfrm>
-            <a:off x="731520" y="5897880"/>
-            <a:ext cx="10607040" cy="274320"/>
-          </a:xfrm>
-          <a:prstGeom prst="rect">
-            <a:avLst/>
-          </a:prstGeom>
-          <a:noFill/>
-          <a:ln/>
-        </p:spPr>
-        <p:txBody>
-          <a:bodyPr wrap="square" rtlCol="0" anchor="ctr"/>
-          <a:lstStyle/>
-          <a:p>
-            <a:pPr indent="0" marL="0">
-              <a:buNone/>
-            </a:pPr>
-            <a:r>
-              <a:rPr lang="en-US" sz="1100" dirty="0">
                 <a:solidFill>
                   <a:srgbClr val="64748B"/>
                 </a:solidFill>
@@ -2960,9 +2465,48 @@
                 <a:ea typeface="Inter" pitchFamily="34" charset="-122"/>
                 <a:cs typeface="Inter" pitchFamily="34" charset="-120"/>
               </a:rPr>
-              <a:t>TCS Agentic AI for Hybrid Infrastructure  ·  Virtualization Operations  ·  Tata Consultancy Services</a:t>
+              <a:t>   ·   Agentic AI-Led Automation Hub</a:t>
             </a:r>
-            <a:endParaRPr lang="en-US" sz="1100" dirty="0"/>
+            <a:endParaRPr lang="en-US" sz="1050" dirty="0"/>
+          </a:p>
+        </p:txBody>
+      </p:sp>
+      <p:sp>
+        <p:nvSpPr>
+          <p:cNvPr id="12" name="Text 10"/>
+          <p:cNvSpPr/>
+          <p:nvPr/>
+        </p:nvSpPr>
+        <p:spPr>
+          <a:xfrm>
+            <a:off x="9509760" y="6181344"/>
+            <a:ext cx="1810512" cy="256032"/>
+          </a:xfrm>
+          <a:prstGeom prst="rect">
+            <a:avLst/>
+          </a:prstGeom>
+          <a:noFill/>
+          <a:ln/>
+        </p:spPr>
+        <p:txBody>
+          <a:bodyPr wrap="square" rtlCol="0" anchor="ctr"/>
+          <a:lstStyle/>
+          <a:p>
+            <a:pPr algn="r" indent="0" marL="0">
+              <a:buNone/>
+            </a:pPr>
+            <a:r>
+              <a:rPr lang="en-US" sz="1050" b="1" spc="220" kern="0" dirty="0">
+                <a:solidFill>
+                  <a:srgbClr val="64748B"/>
+                </a:solidFill>
+                <a:latin typeface="Inter" pitchFamily="34" charset="0"/>
+                <a:ea typeface="Inter" pitchFamily="34" charset="-122"/>
+                <a:cs typeface="Inter" pitchFamily="34" charset="-120"/>
+              </a:rPr>
+              <a:t>UC-10</a:t>
+            </a:r>
+            <a:endParaRPr lang="en-US" sz="1050" dirty="0"/>
           </a:p>
         </p:txBody>
       </p:sp>
